--- a/presentations/La_Minute_Copilot_Architecture.pptx
+++ b/presentations/La_Minute_Copilot_Architecture.pptx
@@ -3859,7 +3859,7 @@
     <p:bg>
       <p:bgPr>
         <a:solidFill>
-          <a:srgbClr val="0078D4"/>
+          <a:srgbClr val="E6F0EA"/>
         </a:solidFill>
         <a:effectLst/>
       </p:bgPr>
@@ -3873,14 +3873,58 @@
       <p:grpSpPr/>
       <p:sp>
         <p:nvSpPr>
-          <p:cNvPr id="2" name="TextBox 1"/>
+          <p:cNvPr id="2" name="Rectangle 1"/>
+          <p:cNvSpPr/>
+          <p:nvPr/>
+        </p:nvSpPr>
+        <p:spPr>
+          <a:xfrm>
+            <a:off x="0" y="0"/>
+            <a:ext cx="6766560" cy="6858000"/>
+          </a:xfrm>
+          <a:prstGeom prst="rect">
+            <a:avLst/>
+          </a:prstGeom>
+          <a:solidFill>
+            <a:srgbClr val="00874E"/>
+          </a:solidFill>
+          <a:ln>
+            <a:noFill/>
+          </a:ln>
+          <a:effectLst/>
+        </p:spPr>
+        <p:style>
+          <a:lnRef idx="1">
+            <a:schemeClr val="accent1"/>
+          </a:lnRef>
+          <a:fillRef idx="3">
+            <a:schemeClr val="accent1"/>
+          </a:fillRef>
+          <a:effectRef idx="2">
+            <a:schemeClr val="accent1"/>
+          </a:effectRef>
+          <a:fontRef idx="minor">
+            <a:schemeClr val="lt1"/>
+          </a:fontRef>
+        </p:style>
+        <p:txBody>
+          <a:bodyPr rtlCol="0" anchor="ctr"/>
+          <a:lstStyle/>
+          <a:p>
+            <a:pPr algn="ctr"/>
+          </a:p>
+        </p:txBody>
+      </p:sp>
+      <p:sp>
+        <p:nvSpPr>
+          <p:cNvPr id="3" name="TextBox 2"/>
           <p:cNvSpPr txBox="1"/>
           <p:nvPr/>
         </p:nvSpPr>
         <p:spPr>
           <a:xfrm>
-            <a:off x="914400" y="1828800"/>
-            <a:ext cx="10058400" cy="1097280"/>
+            <a:off x="640080" y="1828800"/>
+            <a:ext cx="5669280" cy="1463040"/>
           </a:xfrm>
           <a:prstGeom prst="rect">
             <a:avLst/>
@@ -3888,13 +3932,13 @@
           <a:noFill/>
         </p:spPr>
         <p:txBody>
-          <a:bodyPr wrap="square">
+          <a:bodyPr wrap="square" lIns="45720" rIns="45720" tIns="18288" bIns="18288">
             <a:spAutoFit/>
           </a:bodyPr>
           <a:lstStyle/>
           <a:p>
-            <a:pPr algn="ctr">
-              <a:defRPr sz="4800" b="1">
+            <a:pPr algn="l">
+              <a:defRPr sz="4400" b="1">
                 <a:solidFill>
                   <a:srgbClr val="FFFFFF"/>
                 </a:solidFill>
@@ -3902,21 +3946,65 @@
               </a:defRPr>
             </a:pPr>
             <a:r>
-              <a:t>🤖 La minute Copilot</a:t>
-            </a:r>
-          </a:p>
-        </p:txBody>
-      </p:sp>
-      <p:sp>
-        <p:nvSpPr>
-          <p:cNvPr id="3" name="TextBox 2"/>
+              <a:t>La minute Copilot</a:t>
+            </a:r>
+          </a:p>
+        </p:txBody>
+      </p:sp>
+      <p:sp>
+        <p:nvSpPr>
+          <p:cNvPr id="4" name="Rectangle 3"/>
+          <p:cNvSpPr/>
+          <p:nvPr/>
+        </p:nvSpPr>
+        <p:spPr>
+          <a:xfrm>
+            <a:off x="640080" y="3246120"/>
+            <a:ext cx="2926080" cy="36576"/>
+          </a:xfrm>
+          <a:prstGeom prst="rect">
+            <a:avLst/>
+          </a:prstGeom>
+          <a:solidFill>
+            <a:srgbClr val="FFFFFF"/>
+          </a:solidFill>
+          <a:ln>
+            <a:noFill/>
+          </a:ln>
+          <a:effectLst/>
+        </p:spPr>
+        <p:style>
+          <a:lnRef idx="1">
+            <a:schemeClr val="accent1"/>
+          </a:lnRef>
+          <a:fillRef idx="3">
+            <a:schemeClr val="accent1"/>
+          </a:fillRef>
+          <a:effectRef idx="2">
+            <a:schemeClr val="accent1"/>
+          </a:effectRef>
+          <a:fontRef idx="minor">
+            <a:schemeClr val="lt1"/>
+          </a:fontRef>
+        </p:style>
+        <p:txBody>
+          <a:bodyPr rtlCol="0" anchor="ctr"/>
+          <a:lstStyle/>
+          <a:p>
+            <a:pPr algn="ctr"/>
+          </a:p>
+        </p:txBody>
+      </p:sp>
+      <p:sp>
+        <p:nvSpPr>
+          <p:cNvPr id="5" name="TextBox 4"/>
           <p:cNvSpPr txBox="1"/>
           <p:nvPr/>
         </p:nvSpPr>
         <p:spPr>
           <a:xfrm>
-            <a:off x="914400" y="2926080"/>
-            <a:ext cx="10058400" cy="731520"/>
+            <a:off x="640080" y="3429000"/>
+            <a:ext cx="5669280" cy="640080"/>
           </a:xfrm>
           <a:prstGeom prst="rect">
             <a:avLst/>
@@ -3924,35 +4012,35 @@
           <a:noFill/>
         </p:spPr>
         <p:txBody>
-          <a:bodyPr wrap="square">
+          <a:bodyPr wrap="square" lIns="45720" rIns="45720" tIns="18288" bIns="18288">
             <a:spAutoFit/>
           </a:bodyPr>
           <a:lstStyle/>
           <a:p>
-            <a:pPr algn="ctr">
-              <a:defRPr sz="2800" b="0">
-                <a:solidFill>
-                  <a:srgbClr val="AAD4F0"/>
-                </a:solidFill>
-                <a:latin typeface="Calibri"/>
-              </a:defRPr>
-            </a:pPr>
-            <a:r>
-              <a:t>🔧 Architecture d'un prompt en entreprise</a:t>
-            </a:r>
-          </a:p>
-        </p:txBody>
-      </p:sp>
-      <p:sp>
-        <p:nvSpPr>
-          <p:cNvPr id="4" name="TextBox 3"/>
+            <a:pPr algn="l">
+              <a:defRPr sz="2200" b="0">
+                <a:solidFill>
+                  <a:srgbClr val="FFFFFF"/>
+                </a:solidFill>
+                <a:latin typeface="Calibri"/>
+              </a:defRPr>
+            </a:pPr>
+            <a:r>
+              <a:t>Architecture d'un prompt en entreprise</a:t>
+            </a:r>
+          </a:p>
+        </p:txBody>
+      </p:sp>
+      <p:sp>
+        <p:nvSpPr>
+          <p:cNvPr id="6" name="TextBox 5"/>
           <p:cNvSpPr txBox="1"/>
           <p:nvPr/>
         </p:nvSpPr>
         <p:spPr>
           <a:xfrm>
-            <a:off x="914400" y="4114800"/>
-            <a:ext cx="10058400" cy="548640"/>
+            <a:off x="640080" y="4572000"/>
+            <a:ext cx="5669280" cy="365760"/>
           </a:xfrm>
           <a:prstGeom prst="rect">
             <a:avLst/>
@@ -3960,21 +4048,93 @@
           <a:noFill/>
         </p:spPr>
         <p:txBody>
-          <a:bodyPr wrap="square">
+          <a:bodyPr wrap="square" lIns="45720" rIns="45720" tIns="18288" bIns="18288">
             <a:spAutoFit/>
           </a:bodyPr>
           <a:lstStyle/>
           <a:p>
-            <a:pPr algn="ctr">
-              <a:defRPr sz="1600" b="0">
-                <a:solidFill>
-                  <a:srgbClr val="AAD4F0"/>
+            <a:pPr algn="l">
+              <a:defRPr sz="1300" b="0">
+                <a:solidFill>
+                  <a:srgbClr val="CCE0D2"/>
                 </a:solidFill>
                 <a:latin typeface="Calibri"/>
               </a:defRPr>
             </a:pPr>
             <a:r>
               <a:t>Ce qui se passe sous le capot • Métaprompt • Température • Tokens • Sécurité</a:t>
+            </a:r>
+          </a:p>
+        </p:txBody>
+      </p:sp>
+      <p:sp>
+        <p:nvSpPr>
+          <p:cNvPr id="7" name="TextBox 6"/>
+          <p:cNvSpPr txBox="1"/>
+          <p:nvPr/>
+        </p:nvSpPr>
+        <p:spPr>
+          <a:xfrm>
+            <a:off x="640080" y="5029200"/>
+            <a:ext cx="5669280" cy="320040"/>
+          </a:xfrm>
+          <a:prstGeom prst="rect">
+            <a:avLst/>
+          </a:prstGeom>
+          <a:noFill/>
+        </p:spPr>
+        <p:txBody>
+          <a:bodyPr wrap="square" lIns="45720" rIns="45720" tIns="18288" bIns="18288">
+            <a:spAutoFit/>
+          </a:bodyPr>
+          <a:lstStyle/>
+          <a:p>
+            <a:pPr algn="l">
+              <a:defRPr sz="1300" b="1">
+                <a:solidFill>
+                  <a:srgbClr val="FFFFFF"/>
+                </a:solidFill>
+                <a:latin typeface="Calibri"/>
+              </a:defRPr>
+            </a:pPr>
+            <a:r>
+              <a:t>Martin Fournier</a:t>
+            </a:r>
+          </a:p>
+        </p:txBody>
+      </p:sp>
+      <p:sp>
+        <p:nvSpPr>
+          <p:cNvPr id="8" name="TextBox 7"/>
+          <p:cNvSpPr txBox="1"/>
+          <p:nvPr/>
+        </p:nvSpPr>
+        <p:spPr>
+          <a:xfrm>
+            <a:off x="640080" y="5349240"/>
+            <a:ext cx="5669280" cy="274320"/>
+          </a:xfrm>
+          <a:prstGeom prst="rect">
+            <a:avLst/>
+          </a:prstGeom>
+          <a:noFill/>
+        </p:spPr>
+        <p:txBody>
+          <a:bodyPr wrap="square" lIns="45720" rIns="45720" tIns="18288" bIns="18288">
+            <a:spAutoFit/>
+          </a:bodyPr>
+          <a:lstStyle/>
+          <a:p>
+            <a:pPr algn="l">
+              <a:defRPr sz="1200" b="0">
+                <a:solidFill>
+                  <a:srgbClr val="CCE0D2"/>
+                </a:solidFill>
+                <a:latin typeface="Calibri"/>
+              </a:defRPr>
+            </a:pPr>
+            <a:r>
+              <a:t>2026-05-17</a:t>
             </a:r>
           </a:p>
         </p:txBody>
@@ -3993,7 +4153,7 @@
     <p:bg>
       <p:bgPr>
         <a:solidFill>
-          <a:srgbClr val="FFFFFF"/>
+          <a:srgbClr val="E6F0EA"/>
         </a:solidFill>
         <a:effectLst/>
       </p:bgPr>
@@ -4013,8 +4173,8 @@
         </p:nvSpPr>
         <p:spPr>
           <a:xfrm>
-            <a:off x="457200" y="274320"/>
-            <a:ext cx="10972800" cy="640080"/>
+            <a:off x="457200" y="365760"/>
+            <a:ext cx="10972800" cy="731520"/>
           </a:xfrm>
           <a:prstGeom prst="rect">
             <a:avLst/>
@@ -4022,21 +4182,21 @@
           <a:noFill/>
         </p:spPr>
         <p:txBody>
-          <a:bodyPr wrap="square">
+          <a:bodyPr wrap="square" lIns="45720" rIns="45720" tIns="18288" bIns="18288">
             <a:spAutoFit/>
           </a:bodyPr>
           <a:lstStyle/>
           <a:p>
             <a:pPr algn="l">
-              <a:defRPr sz="3200" b="1">
-                <a:solidFill>
-                  <a:srgbClr val="2B2B2B"/>
-                </a:solidFill>
-                <a:latin typeface="Calibri"/>
-              </a:defRPr>
-            </a:pPr>
-            <a:r>
-              <a:t>📦 Votre prompt n'arrive jamais seul</a:t>
+              <a:defRPr sz="2800" b="1">
+                <a:solidFill>
+                  <a:srgbClr val="006B3F"/>
+                </a:solidFill>
+                <a:latin typeface="Calibri"/>
+              </a:defRPr>
+            </a:pPr>
+            <a:r>
+              <a:t>Votre prompt n'arrive jamais seul</a:t>
             </a:r>
           </a:p>
         </p:txBody>
@@ -4049,8 +4209,8 @@
         </p:nvSpPr>
         <p:spPr>
           <a:xfrm>
-            <a:off x="457200" y="914400"/>
-            <a:ext cx="10972800" cy="457200"/>
+            <a:off x="457200" y="1005840"/>
+            <a:ext cx="10972800" cy="411480"/>
           </a:xfrm>
           <a:prstGeom prst="rect">
             <a:avLst/>
@@ -4058,13 +4218,13 @@
           <a:noFill/>
         </p:spPr>
         <p:txBody>
-          <a:bodyPr wrap="square">
+          <a:bodyPr wrap="square" lIns="45720" rIns="45720" tIns="18288" bIns="18288">
             <a:spAutoFit/>
           </a:bodyPr>
           <a:lstStyle/>
           <a:p>
             <a:pPr algn="l">
-              <a:defRPr sz="1800" b="0">
+              <a:defRPr sz="1500" b="0">
                 <a:solidFill>
                   <a:srgbClr val="6B6B6B"/>
                 </a:solidFill>
@@ -4079,113 +4239,25 @@
       </p:sp>
       <p:sp>
         <p:nvSpPr>
-          <p:cNvPr id="4" name="TextBox 3"/>
-          <p:cNvSpPr txBox="1"/>
-          <p:nvPr/>
-        </p:nvSpPr>
-        <p:spPr>
-          <a:xfrm>
-            <a:off x="457200" y="1554480"/>
-            <a:ext cx="10972800" cy="1371600"/>
-          </a:xfrm>
-          <a:prstGeom prst="rect">
-            <a:avLst/>
-          </a:prstGeom>
-          <a:noFill/>
-        </p:spPr>
-        <p:txBody>
-          <a:bodyPr wrap="square">
-            <a:spAutoFit/>
-          </a:bodyPr>
-          <a:lstStyle/>
-          <a:p>
-            <a:pPr>
-              <a:spcAft>
-                <a:spcPts val="400"/>
-              </a:spcAft>
-              <a:defRPr sz="1400">
-                <a:solidFill>
-                  <a:srgbClr val="2B2B2B"/>
-                </a:solidFill>
-                <a:latin typeface="Calibri"/>
-              </a:defRPr>
-            </a:pPr>
-            <a:r>
-              <a:t>• Microsoft ajoute un métaprompt (2000-10 000 tokens) AVANT votre message</a:t>
-            </a:r>
-          </a:p>
-          <a:p>
-            <a:pPr>
-              <a:spcAft>
-                <a:spcPts val="400"/>
-              </a:spcAft>
-              <a:defRPr sz="1400">
-                <a:solidFill>
-                  <a:srgbClr val="2B2B2B"/>
-                </a:solidFill>
-                <a:latin typeface="Calibri"/>
-              </a:defRPr>
-            </a:pPr>
-            <a:r>
-              <a:t>• Ce métaprompt contient: instructions de sécurité, format, sources, politique</a:t>
-            </a:r>
-          </a:p>
-          <a:p>
-            <a:pPr>
-              <a:spcAft>
-                <a:spcPts val="400"/>
-              </a:spcAft>
-              <a:defRPr sz="1400">
-                <a:solidFill>
-                  <a:srgbClr val="2B2B2B"/>
-                </a:solidFill>
-                <a:latin typeface="Calibri"/>
-              </a:defRPr>
-            </a:pPr>
-            <a:r>
-              <a:t>• Votre prompt est injecté dans ce template côté serveur</a:t>
-            </a:r>
-          </a:p>
-          <a:p>
-            <a:pPr>
-              <a:spcAft>
-                <a:spcPts val="400"/>
-              </a:spcAft>
-              <a:defRPr sz="1400">
-                <a:solidFill>
-                  <a:srgbClr val="2B2B2B"/>
-                </a:solidFill>
-                <a:latin typeface="Calibri"/>
-              </a:defRPr>
-            </a:pPr>
-            <a:r>
-              <a:t>• C'est ce qui différencie Copilot entreprise de ChatGPT standard</a:t>
-            </a:r>
-          </a:p>
-        </p:txBody>
-      </p:sp>
-      <p:sp>
-        <p:nvSpPr>
-          <p:cNvPr id="5" name="Rectangle 4"/>
+          <p:cNvPr id="4" name="Rectangle 3"/>
           <p:cNvSpPr/>
           <p:nvPr/>
         </p:nvSpPr>
         <p:spPr>
           <a:xfrm>
-            <a:off x="457200" y="3017520"/>
-            <a:ext cx="3383280" cy="3657600"/>
+            <a:off x="457200" y="1508760"/>
+            <a:ext cx="11274552" cy="18288"/>
           </a:xfrm>
           <a:prstGeom prst="rect">
             <a:avLst/>
           </a:prstGeom>
           <a:solidFill>
-            <a:srgbClr val="FFFFFF"/>
+            <a:srgbClr val="00874E"/>
           </a:solidFill>
           <a:ln>
-            <a:solidFill>
-              <a:srgbClr val="E0E0E0"/>
-            </a:solidFill>
+            <a:noFill/>
           </a:ln>
+          <a:effectLst/>
         </p:spPr>
         <p:style>
           <a:lnRef idx="1">
@@ -4211,14 +4283,14 @@
       </p:sp>
       <p:sp>
         <p:nvSpPr>
-          <p:cNvPr id="6" name="TextBox 5"/>
+          <p:cNvPr id="5" name="TextBox 4"/>
           <p:cNvSpPr txBox="1"/>
           <p:nvPr/>
         </p:nvSpPr>
         <p:spPr>
           <a:xfrm>
-            <a:off x="731520" y="3200400"/>
-            <a:ext cx="2834640" cy="457200"/>
+            <a:off x="457200" y="1737360"/>
+            <a:ext cx="10972800" cy="1188720"/>
           </a:xfrm>
           <a:prstGeom prst="rect">
             <a:avLst/>
@@ -4231,114 +4303,81 @@
           </a:bodyPr>
           <a:lstStyle/>
           <a:p>
-            <a:pPr algn="l">
-              <a:defRPr sz="1800" b="1">
-                <a:solidFill>
-                  <a:srgbClr val="0078D4"/>
-                </a:solidFill>
-                <a:latin typeface="Calibri"/>
-              </a:defRPr>
-            </a:pPr>
-            <a:r>
-              <a:t>📤 Ce que vous écrivez</a:t>
-            </a:r>
-          </a:p>
-        </p:txBody>
-      </p:sp>
-      <p:sp>
-        <p:nvSpPr>
-          <p:cNvPr id="7" name="TextBox 6"/>
-          <p:cNvSpPr txBox="1"/>
-          <p:nvPr/>
-        </p:nvSpPr>
-        <p:spPr>
-          <a:xfrm>
-            <a:off x="731520" y="3657600"/>
-            <a:ext cx="2834640" cy="2743200"/>
-          </a:xfrm>
-          <a:prstGeom prst="rect">
-            <a:avLst/>
-          </a:prstGeom>
-          <a:noFill/>
-        </p:spPr>
-        <p:txBody>
-          <a:bodyPr wrap="square">
-            <a:spAutoFit/>
-          </a:bodyPr>
-          <a:lstStyle/>
-          <a:p>
-            <a:pPr>
-              <a:spcAft>
-                <a:spcPts val="400"/>
-              </a:spcAft>
-              <a:defRPr sz="1300">
-                <a:solidFill>
-                  <a:srgbClr val="2B2B2B"/>
-                </a:solidFill>
-                <a:latin typeface="Calibri"/>
-              </a:defRPr>
-            </a:pPr>
-            <a:r>
-              <a:t>«Résume ce document</a:t>
-            </a:r>
-          </a:p>
-          <a:p>
-            <a:pPr>
-              <a:spcAft>
-                <a:spcPts val="400"/>
-              </a:spcAft>
-              <a:defRPr sz="1300">
-                <a:solidFill>
-                  <a:srgbClr val="2B2B2B"/>
-                </a:solidFill>
-                <a:latin typeface="Calibri"/>
-              </a:defRPr>
-            </a:pPr>
-            <a:r>
-              <a:t>et liste les actions»</a:t>
-            </a:r>
-          </a:p>
-          <a:p>
-            <a:pPr>
-              <a:spcAft>
-                <a:spcPts val="400"/>
-              </a:spcAft>
-              <a:defRPr sz="1300">
-                <a:solidFill>
-                  <a:srgbClr val="2B2B2B"/>
-                </a:solidFill>
-                <a:latin typeface="Calibri"/>
-              </a:defRPr>
-            </a:pPr>
-          </a:p>
-          <a:p>
-            <a:pPr>
-              <a:spcAft>
-                <a:spcPts val="400"/>
-              </a:spcAft>
-              <a:defRPr sz="1300">
-                <a:solidFill>
-                  <a:srgbClr val="2B2B2B"/>
-                </a:solidFill>
-                <a:latin typeface="Calibri"/>
-              </a:defRPr>
-            </a:pPr>
-            <a:r>
-              <a:t>↕ 20-50 tokens</a:t>
-            </a:r>
-          </a:p>
-        </p:txBody>
-      </p:sp>
-      <p:sp>
-        <p:nvSpPr>
-          <p:cNvPr id="8" name="Rectangle 7"/>
+            <a:pPr>
+              <a:spcAft>
+                <a:spcPts val="400"/>
+              </a:spcAft>
+              <a:defRPr sz="1400">
+                <a:solidFill>
+                  <a:srgbClr val="2B2B2B"/>
+                </a:solidFill>
+                <a:latin typeface="Calibri"/>
+              </a:defRPr>
+            </a:pPr>
+            <a:r>
+              <a:t>• Microsoft ajoute un métaprompt (2000-10 000 tokens) AVANT votre message</a:t>
+            </a:r>
+          </a:p>
+          <a:p>
+            <a:pPr>
+              <a:spcAft>
+                <a:spcPts val="400"/>
+              </a:spcAft>
+              <a:defRPr sz="1400">
+                <a:solidFill>
+                  <a:srgbClr val="2B2B2B"/>
+                </a:solidFill>
+                <a:latin typeface="Calibri"/>
+              </a:defRPr>
+            </a:pPr>
+            <a:r>
+              <a:t>• Ce métaprompt contient: instructions de sécurité, format, sources, politique</a:t>
+            </a:r>
+          </a:p>
+          <a:p>
+            <a:pPr>
+              <a:spcAft>
+                <a:spcPts val="400"/>
+              </a:spcAft>
+              <a:defRPr sz="1400">
+                <a:solidFill>
+                  <a:srgbClr val="2B2B2B"/>
+                </a:solidFill>
+                <a:latin typeface="Calibri"/>
+              </a:defRPr>
+            </a:pPr>
+            <a:r>
+              <a:t>• Votre prompt est injecté dans ce template côté serveur</a:t>
+            </a:r>
+          </a:p>
+          <a:p>
+            <a:pPr>
+              <a:spcAft>
+                <a:spcPts val="400"/>
+              </a:spcAft>
+              <a:defRPr sz="1400">
+                <a:solidFill>
+                  <a:srgbClr val="2B2B2B"/>
+                </a:solidFill>
+                <a:latin typeface="Calibri"/>
+              </a:defRPr>
+            </a:pPr>
+            <a:r>
+              <a:t>• C'est ce qui différencie Copilot entreprise de ChatGPT standard</a:t>
+            </a:r>
+          </a:p>
+        </p:txBody>
+      </p:sp>
+      <p:sp>
+        <p:nvSpPr>
+          <p:cNvPr id="6" name="Rectangle 5"/>
           <p:cNvSpPr/>
           <p:nvPr/>
         </p:nvSpPr>
         <p:spPr>
           <a:xfrm>
-            <a:off x="4114800" y="3017520"/>
-            <a:ext cx="3383280" cy="3657600"/>
+            <a:off x="457200" y="2926080"/>
+            <a:ext cx="3383280" cy="3291840"/>
           </a:xfrm>
           <a:prstGeom prst="rect">
             <a:avLst/>
@@ -4351,6 +4390,7 @@
               <a:srgbClr val="E0E0E0"/>
             </a:solidFill>
           </a:ln>
+          <a:effectLst/>
         </p:spPr>
         <p:style>
           <a:lnRef idx="1">
@@ -4374,6 +4414,66 @@
           </a:p>
         </p:txBody>
       </p:sp>
+      <p:pic>
+        <p:nvPicPr>
+          <p:cNvPr id="7" name="Picture 6" descr="pencil_00874E_30.png"/>
+          <p:cNvPicPr>
+            <a:picLocks noChangeAspect="1"/>
+          </p:cNvPicPr>
+          <p:nvPr/>
+        </p:nvPicPr>
+        <p:blipFill>
+          <a:blip r:embed="rId3"/>
+          <a:stretch>
+            <a:fillRect/>
+          </a:stretch>
+        </p:blipFill>
+        <p:spPr>
+          <a:xfrm>
+            <a:off x="713232" y="3090672"/>
+            <a:ext cx="292608" cy="292608"/>
+          </a:xfrm>
+          <a:prstGeom prst="rect">
+            <a:avLst/>
+          </a:prstGeom>
+        </p:spPr>
+      </p:pic>
+      <p:sp>
+        <p:nvSpPr>
+          <p:cNvPr id="8" name="TextBox 7"/>
+          <p:cNvSpPr txBox="1"/>
+          <p:nvPr/>
+        </p:nvSpPr>
+        <p:spPr>
+          <a:xfrm>
+            <a:off x="1115568" y="3108960"/>
+            <a:ext cx="2542032" cy="457200"/>
+          </a:xfrm>
+          <a:prstGeom prst="rect">
+            <a:avLst/>
+          </a:prstGeom>
+          <a:noFill/>
+        </p:spPr>
+        <p:txBody>
+          <a:bodyPr wrap="square" lIns="45720" rIns="45720" tIns="18288" bIns="18288">
+            <a:spAutoFit/>
+          </a:bodyPr>
+          <a:lstStyle/>
+          <a:p>
+            <a:pPr algn="l">
+              <a:defRPr sz="1700" b="1">
+                <a:solidFill>
+                  <a:srgbClr val="00874E"/>
+                </a:solidFill>
+                <a:latin typeface="Calibri"/>
+              </a:defRPr>
+            </a:pPr>
+            <a:r>
+              <a:t>Ce que vous écrivez</a:t>
+            </a:r>
+          </a:p>
+        </p:txBody>
+      </p:sp>
       <p:sp>
         <p:nvSpPr>
           <p:cNvPr id="9" name="TextBox 8"/>
@@ -4382,8 +4482,8 @@
         </p:nvSpPr>
         <p:spPr>
           <a:xfrm>
-            <a:off x="4389120" y="3200400"/>
-            <a:ext cx="2834640" cy="457200"/>
+            <a:off x="731520" y="3703320"/>
+            <a:ext cx="2834640" cy="2331720"/>
           </a:xfrm>
           <a:prstGeom prst="rect">
             <a:avLst/>
@@ -4396,42 +4496,6 @@
           </a:bodyPr>
           <a:lstStyle/>
           <a:p>
-            <a:pPr algn="l">
-              <a:defRPr sz="1800" b="1">
-                <a:solidFill>
-                  <a:srgbClr val="F59E0B"/>
-                </a:solidFill>
-                <a:latin typeface="Calibri"/>
-              </a:defRPr>
-            </a:pPr>
-            <a:r>
-              <a:t>⚙️ Ce que le serveur reçoit</a:t>
-            </a:r>
-          </a:p>
-        </p:txBody>
-      </p:sp>
-      <p:sp>
-        <p:nvSpPr>
-          <p:cNvPr id="10" name="TextBox 9"/>
-          <p:cNvSpPr txBox="1"/>
-          <p:nvPr/>
-        </p:nvSpPr>
-        <p:spPr>
-          <a:xfrm>
-            <a:off x="4389120" y="3657600"/>
-            <a:ext cx="2834640" cy="2743200"/>
-          </a:xfrm>
-          <a:prstGeom prst="rect">
-            <a:avLst/>
-          </a:prstGeom>
-          <a:noFill/>
-        </p:spPr>
-        <p:txBody>
-          <a:bodyPr wrap="square">
-            <a:spAutoFit/>
-          </a:bodyPr>
-          <a:lstStyle/>
-          <a:p>
             <a:pPr>
               <a:spcAft>
                 <a:spcPts val="400"/>
@@ -4444,7 +4508,7 @@
               </a:defRPr>
             </a:pPr>
             <a:r>
-              <a:t>[Métaprompt système]</a:t>
+              <a:t>«Résume ce document</a:t>
             </a:r>
           </a:p>
           <a:p>
@@ -4460,7 +4524,7 @@
               </a:defRPr>
             </a:pPr>
             <a:r>
-              <a:t>  • Instructions de sécurité</a:t>
+              <a:t>et liste les actions»</a:t>
             </a:r>
           </a:p>
           <a:p>
@@ -4475,9 +4539,6 @@
                 <a:latin typeface="Calibri"/>
               </a:defRPr>
             </a:pPr>
-            <a:r>
-              <a:t>  • Politiques conformité</a:t>
-            </a:r>
           </a:p>
           <a:p>
             <a:pPr>
@@ -4492,98 +4553,21 @@
               </a:defRPr>
             </a:pPr>
             <a:r>
-              <a:t>  • Sources autorisées</a:t>
-            </a:r>
-          </a:p>
-          <a:p>
-            <a:pPr>
-              <a:spcAft>
-                <a:spcPts val="400"/>
-              </a:spcAft>
-              <a:defRPr sz="1300">
-                <a:solidFill>
-                  <a:srgbClr val="2B2B2B"/>
-                </a:solidFill>
-                <a:latin typeface="Calibri"/>
-              </a:defRPr>
-            </a:pPr>
-            <a:r>
-              <a:t>  • Format de réponse</a:t>
-            </a:r>
-          </a:p>
-          <a:p>
-            <a:pPr>
-              <a:spcAft>
-                <a:spcPts val="400"/>
-              </a:spcAft>
-              <a:defRPr sz="1300">
-                <a:solidFill>
-                  <a:srgbClr val="2B2B2B"/>
-                </a:solidFill>
-                <a:latin typeface="Calibri"/>
-              </a:defRPr>
-            </a:pPr>
-            <a:r>
-              <a:t>  • Règles anti-hallucination</a:t>
-            </a:r>
-          </a:p>
-          <a:p>
-            <a:pPr>
-              <a:spcAft>
-                <a:spcPts val="400"/>
-              </a:spcAft>
-              <a:defRPr sz="1300">
-                <a:solidFill>
-                  <a:srgbClr val="2B2B2B"/>
-                </a:solidFill>
-                <a:latin typeface="Calibri"/>
-              </a:defRPr>
-            </a:pPr>
-          </a:p>
-          <a:p>
-            <a:pPr>
-              <a:spcAft>
-                <a:spcPts val="400"/>
-              </a:spcAft>
-              <a:defRPr sz="1300">
-                <a:solidFill>
-                  <a:srgbClr val="2B2B2B"/>
-                </a:solidFill>
-                <a:latin typeface="Calibri"/>
-              </a:defRPr>
-            </a:pPr>
-            <a:r>
-              <a:t>[Votre prompt]</a:t>
-            </a:r>
-          </a:p>
-          <a:p>
-            <a:pPr>
-              <a:spcAft>
-                <a:spcPts val="400"/>
-              </a:spcAft>
-              <a:defRPr sz="1300">
-                <a:solidFill>
-                  <a:srgbClr val="2B2B2B"/>
-                </a:solidFill>
-                <a:latin typeface="Calibri"/>
-              </a:defRPr>
-            </a:pPr>
-            <a:r>
-              <a:t>  • Résume ce document...</a:t>
-            </a:r>
-          </a:p>
-        </p:txBody>
-      </p:sp>
-      <p:sp>
-        <p:nvSpPr>
-          <p:cNvPr id="11" name="Rectangle 10"/>
+              <a:t>↕ 20-50 tokens</a:t>
+            </a:r>
+          </a:p>
+        </p:txBody>
+      </p:sp>
+      <p:sp>
+        <p:nvSpPr>
+          <p:cNvPr id="10" name="Rectangle 9"/>
           <p:cNvSpPr/>
           <p:nvPr/>
         </p:nvSpPr>
         <p:spPr>
           <a:xfrm>
-            <a:off x="7772400" y="3017520"/>
-            <a:ext cx="3383280" cy="3657600"/>
+            <a:off x="4114800" y="2926080"/>
+            <a:ext cx="3383280" cy="3291840"/>
           </a:xfrm>
           <a:prstGeom prst="rect">
             <a:avLst/>
@@ -4596,6 +4580,7 @@
               <a:srgbClr val="E0E0E0"/>
             </a:solidFill>
           </a:ln>
+          <a:effectLst/>
         </p:spPr>
         <p:style>
           <a:lnRef idx="1">
@@ -4619,6 +4604,30 @@
           </a:p>
         </p:txBody>
       </p:sp>
+      <p:pic>
+        <p:nvPicPr>
+          <p:cNvPr id="11" name="Picture 10" descr="server_F59E0B_30.png"/>
+          <p:cNvPicPr>
+            <a:picLocks noChangeAspect="1"/>
+          </p:cNvPicPr>
+          <p:nvPr/>
+        </p:nvPicPr>
+        <p:blipFill>
+          <a:blip r:embed="rId4"/>
+          <a:stretch>
+            <a:fillRect/>
+          </a:stretch>
+        </p:blipFill>
+        <p:spPr>
+          <a:xfrm>
+            <a:off x="4370832" y="3090672"/>
+            <a:ext cx="292608" cy="292608"/>
+          </a:xfrm>
+          <a:prstGeom prst="rect">
+            <a:avLst/>
+          </a:prstGeom>
+        </p:spPr>
+      </p:pic>
       <p:sp>
         <p:nvSpPr>
           <p:cNvPr id="12" name="TextBox 11"/>
@@ -4627,8 +4636,44 @@
         </p:nvSpPr>
         <p:spPr>
           <a:xfrm>
-            <a:off x="8046720" y="3200400"/>
-            <a:ext cx="2834640" cy="457200"/>
+            <a:off x="4773168" y="3108960"/>
+            <a:ext cx="2542031" cy="457200"/>
+          </a:xfrm>
+          <a:prstGeom prst="rect">
+            <a:avLst/>
+          </a:prstGeom>
+          <a:noFill/>
+        </p:spPr>
+        <p:txBody>
+          <a:bodyPr wrap="square" lIns="45720" rIns="45720" tIns="18288" bIns="18288">
+            <a:spAutoFit/>
+          </a:bodyPr>
+          <a:lstStyle/>
+          <a:p>
+            <a:pPr algn="l">
+              <a:defRPr sz="1700" b="1">
+                <a:solidFill>
+                  <a:srgbClr val="F59E0B"/>
+                </a:solidFill>
+                <a:latin typeface="Calibri"/>
+              </a:defRPr>
+            </a:pPr>
+            <a:r>
+              <a:t>Ce que le serveur reçoit</a:t>
+            </a:r>
+          </a:p>
+        </p:txBody>
+      </p:sp>
+      <p:sp>
+        <p:nvSpPr>
+          <p:cNvPr id="13" name="TextBox 12"/>
+          <p:cNvSpPr txBox="1"/>
+          <p:nvPr/>
+        </p:nvSpPr>
+        <p:spPr>
+          <a:xfrm>
+            <a:off x="4389120" y="3703320"/>
+            <a:ext cx="2834640" cy="2331720"/>
           </a:xfrm>
           <a:prstGeom prst="rect">
             <a:avLst/>
@@ -4641,30 +4686,264 @@
           </a:bodyPr>
           <a:lstStyle/>
           <a:p>
+            <a:pPr>
+              <a:spcAft>
+                <a:spcPts val="400"/>
+              </a:spcAft>
+              <a:defRPr sz="1300">
+                <a:solidFill>
+                  <a:srgbClr val="2B2B2B"/>
+                </a:solidFill>
+                <a:latin typeface="Calibri"/>
+              </a:defRPr>
+            </a:pPr>
+            <a:r>
+              <a:t>[Métaprompt système]</a:t>
+            </a:r>
+          </a:p>
+          <a:p>
+            <a:pPr>
+              <a:spcAft>
+                <a:spcPts val="400"/>
+              </a:spcAft>
+              <a:defRPr sz="1300">
+                <a:solidFill>
+                  <a:srgbClr val="2B2B2B"/>
+                </a:solidFill>
+                <a:latin typeface="Calibri"/>
+              </a:defRPr>
+            </a:pPr>
+            <a:r>
+              <a:t>• Instructions de sécurité</a:t>
+            </a:r>
+          </a:p>
+          <a:p>
+            <a:pPr>
+              <a:spcAft>
+                <a:spcPts val="400"/>
+              </a:spcAft>
+              <a:defRPr sz="1300">
+                <a:solidFill>
+                  <a:srgbClr val="2B2B2B"/>
+                </a:solidFill>
+                <a:latin typeface="Calibri"/>
+              </a:defRPr>
+            </a:pPr>
+            <a:r>
+              <a:t>• Politiques conformité</a:t>
+            </a:r>
+          </a:p>
+          <a:p>
+            <a:pPr>
+              <a:spcAft>
+                <a:spcPts val="400"/>
+              </a:spcAft>
+              <a:defRPr sz="1300">
+                <a:solidFill>
+                  <a:srgbClr val="2B2B2B"/>
+                </a:solidFill>
+                <a:latin typeface="Calibri"/>
+              </a:defRPr>
+            </a:pPr>
+            <a:r>
+              <a:t>• Sources autorisées</a:t>
+            </a:r>
+          </a:p>
+          <a:p>
+            <a:pPr>
+              <a:spcAft>
+                <a:spcPts val="400"/>
+              </a:spcAft>
+              <a:defRPr sz="1300">
+                <a:solidFill>
+                  <a:srgbClr val="2B2B2B"/>
+                </a:solidFill>
+                <a:latin typeface="Calibri"/>
+              </a:defRPr>
+            </a:pPr>
+            <a:r>
+              <a:t>• Format de réponse</a:t>
+            </a:r>
+          </a:p>
+          <a:p>
+            <a:pPr>
+              <a:spcAft>
+                <a:spcPts val="400"/>
+              </a:spcAft>
+              <a:defRPr sz="1300">
+                <a:solidFill>
+                  <a:srgbClr val="2B2B2B"/>
+                </a:solidFill>
+                <a:latin typeface="Calibri"/>
+              </a:defRPr>
+            </a:pPr>
+            <a:r>
+              <a:t>• Règles anti-hallucination</a:t>
+            </a:r>
+          </a:p>
+          <a:p>
+            <a:pPr>
+              <a:spcAft>
+                <a:spcPts val="400"/>
+              </a:spcAft>
+              <a:defRPr sz="1300">
+                <a:solidFill>
+                  <a:srgbClr val="2B2B2B"/>
+                </a:solidFill>
+                <a:latin typeface="Calibri"/>
+              </a:defRPr>
+            </a:pPr>
+          </a:p>
+          <a:p>
+            <a:pPr>
+              <a:spcAft>
+                <a:spcPts val="400"/>
+              </a:spcAft>
+              <a:defRPr sz="1300">
+                <a:solidFill>
+                  <a:srgbClr val="2B2B2B"/>
+                </a:solidFill>
+                <a:latin typeface="Calibri"/>
+              </a:defRPr>
+            </a:pPr>
+            <a:r>
+              <a:t>[Votre prompt]</a:t>
+            </a:r>
+          </a:p>
+          <a:p>
+            <a:pPr>
+              <a:spcAft>
+                <a:spcPts val="400"/>
+              </a:spcAft>
+              <a:defRPr sz="1300">
+                <a:solidFill>
+                  <a:srgbClr val="2B2B2B"/>
+                </a:solidFill>
+                <a:latin typeface="Calibri"/>
+              </a:defRPr>
+            </a:pPr>
+            <a:r>
+              <a:t>• Résume ce document...</a:t>
+            </a:r>
+          </a:p>
+        </p:txBody>
+      </p:sp>
+      <p:sp>
+        <p:nvSpPr>
+          <p:cNvPr id="14" name="Rectangle 13"/>
+          <p:cNvSpPr/>
+          <p:nvPr/>
+        </p:nvSpPr>
+        <p:spPr>
+          <a:xfrm>
+            <a:off x="7772400" y="2926080"/>
+            <a:ext cx="3383280" cy="3291840"/>
+          </a:xfrm>
+          <a:prstGeom prst="rect">
+            <a:avLst/>
+          </a:prstGeom>
+          <a:solidFill>
+            <a:srgbClr val="FFFFFF"/>
+          </a:solidFill>
+          <a:ln>
+            <a:solidFill>
+              <a:srgbClr val="E0E0E0"/>
+            </a:solidFill>
+          </a:ln>
+          <a:effectLst/>
+        </p:spPr>
+        <p:style>
+          <a:lnRef idx="1">
+            <a:schemeClr val="accent1"/>
+          </a:lnRef>
+          <a:fillRef idx="3">
+            <a:schemeClr val="accent1"/>
+          </a:fillRef>
+          <a:effectRef idx="2">
+            <a:schemeClr val="accent1"/>
+          </a:effectRef>
+          <a:fontRef idx="minor">
+            <a:schemeClr val="lt1"/>
+          </a:fontRef>
+        </p:style>
+        <p:txBody>
+          <a:bodyPr rtlCol="0" anchor="ctr"/>
+          <a:lstStyle/>
+          <a:p>
+            <a:pPr algn="ctr"/>
+          </a:p>
+        </p:txBody>
+      </p:sp>
+      <p:pic>
+        <p:nvPicPr>
+          <p:cNvPr id="15" name="Picture 14" descr="layers_00874E_30.png"/>
+          <p:cNvPicPr>
+            <a:picLocks noChangeAspect="1"/>
+          </p:cNvPicPr>
+          <p:nvPr/>
+        </p:nvPicPr>
+        <p:blipFill>
+          <a:blip r:embed="rId5"/>
+          <a:stretch>
+            <a:fillRect/>
+          </a:stretch>
+        </p:blipFill>
+        <p:spPr>
+          <a:xfrm>
+            <a:off x="8028431" y="3090672"/>
+            <a:ext cx="292608" cy="292608"/>
+          </a:xfrm>
+          <a:prstGeom prst="rect">
+            <a:avLst/>
+          </a:prstGeom>
+        </p:spPr>
+      </p:pic>
+      <p:sp>
+        <p:nvSpPr>
+          <p:cNvPr id="16" name="TextBox 15"/>
+          <p:cNvSpPr txBox="1"/>
+          <p:nvPr/>
+        </p:nvSpPr>
+        <p:spPr>
+          <a:xfrm>
+            <a:off x="8430767" y="3108960"/>
+            <a:ext cx="2542032" cy="457200"/>
+          </a:xfrm>
+          <a:prstGeom prst="rect">
+            <a:avLst/>
+          </a:prstGeom>
+          <a:noFill/>
+        </p:spPr>
+        <p:txBody>
+          <a:bodyPr wrap="square" lIns="45720" rIns="45720" tIns="18288" bIns="18288">
+            <a:spAutoFit/>
+          </a:bodyPr>
+          <a:lstStyle/>
+          <a:p>
             <a:pPr algn="l">
-              <a:defRPr sz="1800" b="1">
-                <a:solidFill>
-                  <a:srgbClr val="10B981"/>
-                </a:solidFill>
-                <a:latin typeface="Calibri"/>
-              </a:defRPr>
-            </a:pPr>
-            <a:r>
-              <a:t>🧠 Total au modèle</a:t>
-            </a:r>
-          </a:p>
-        </p:txBody>
-      </p:sp>
-      <p:sp>
-        <p:nvSpPr>
-          <p:cNvPr id="13" name="TextBox 12"/>
+              <a:defRPr sz="1700" b="1">
+                <a:solidFill>
+                  <a:srgbClr val="00874E"/>
+                </a:solidFill>
+                <a:latin typeface="Calibri"/>
+              </a:defRPr>
+            </a:pPr>
+            <a:r>
+              <a:t>Total au modèle</a:t>
+            </a:r>
+          </a:p>
+        </p:txBody>
+      </p:sp>
+      <p:sp>
+        <p:nvSpPr>
+          <p:cNvPr id="17" name="TextBox 16"/>
           <p:cNvSpPr txBox="1"/>
           <p:nvPr/>
         </p:nvSpPr>
         <p:spPr>
           <a:xfrm>
-            <a:off x="8046720" y="3657600"/>
-            <a:ext cx="2834640" cy="2743200"/>
+            <a:off x="8046720" y="3703320"/>
+            <a:ext cx="2834640" cy="2331720"/>
           </a:xfrm>
           <a:prstGeom prst="rect">
             <a:avLst/>
@@ -4750,7 +5029,7 @@
               </a:defRPr>
             </a:pPr>
             <a:r>
-              <a:t>💡 Le métaprompt mange</a:t>
+              <a:t>Le métaprompt mange</a:t>
             </a:r>
           </a:p>
           <a:p>
@@ -4766,7 +5045,123 @@
               </a:defRPr>
             </a:pPr>
             <a:r>
-              <a:t>   la majorité du contexte!</a:t>
+              <a:t>la majorité du contexte!</a:t>
+            </a:r>
+          </a:p>
+        </p:txBody>
+      </p:sp>
+      <p:sp>
+        <p:nvSpPr>
+          <p:cNvPr id="18" name="Rectangle 17"/>
+          <p:cNvSpPr/>
+          <p:nvPr/>
+        </p:nvSpPr>
+        <p:spPr>
+          <a:xfrm>
+            <a:off x="457200" y="6446520"/>
+            <a:ext cx="11274552" cy="13716"/>
+          </a:xfrm>
+          <a:prstGeom prst="rect">
+            <a:avLst/>
+          </a:prstGeom>
+          <a:solidFill>
+            <a:srgbClr val="00874E"/>
+          </a:solidFill>
+          <a:ln>
+            <a:noFill/>
+          </a:ln>
+          <a:effectLst/>
+        </p:spPr>
+        <p:style>
+          <a:lnRef idx="1">
+            <a:schemeClr val="accent1"/>
+          </a:lnRef>
+          <a:fillRef idx="3">
+            <a:schemeClr val="accent1"/>
+          </a:fillRef>
+          <a:effectRef idx="2">
+            <a:schemeClr val="accent1"/>
+          </a:effectRef>
+          <a:fontRef idx="minor">
+            <a:schemeClr val="lt1"/>
+          </a:fontRef>
+        </p:style>
+        <p:txBody>
+          <a:bodyPr rtlCol="0" anchor="ctr"/>
+          <a:lstStyle/>
+          <a:p>
+            <a:pPr algn="ctr"/>
+          </a:p>
+        </p:txBody>
+      </p:sp>
+      <p:sp>
+        <p:nvSpPr>
+          <p:cNvPr id="19" name="TextBox 18"/>
+          <p:cNvSpPr txBox="1"/>
+          <p:nvPr/>
+        </p:nvSpPr>
+        <p:spPr>
+          <a:xfrm>
+            <a:off x="457200" y="6537960"/>
+            <a:ext cx="5486400" cy="274320"/>
+          </a:xfrm>
+          <a:prstGeom prst="rect">
+            <a:avLst/>
+          </a:prstGeom>
+          <a:noFill/>
+        </p:spPr>
+        <p:txBody>
+          <a:bodyPr wrap="square" lIns="45720" rIns="45720" tIns="18288" bIns="18288">
+            <a:spAutoFit/>
+          </a:bodyPr>
+          <a:lstStyle/>
+          <a:p>
+            <a:pPr algn="l">
+              <a:defRPr sz="1000" b="0">
+                <a:solidFill>
+                  <a:srgbClr val="6B6B6B"/>
+                </a:solidFill>
+                <a:latin typeface="Calibri"/>
+              </a:defRPr>
+            </a:pPr>
+            <a:r>
+              <a:t>La minute Copilot</a:t>
+            </a:r>
+          </a:p>
+        </p:txBody>
+      </p:sp>
+      <p:sp>
+        <p:nvSpPr>
+          <p:cNvPr id="20" name="TextBox 19"/>
+          <p:cNvSpPr txBox="1"/>
+          <p:nvPr/>
+        </p:nvSpPr>
+        <p:spPr>
+          <a:xfrm>
+            <a:off x="10972800" y="6537960"/>
+            <a:ext cx="822960" cy="274320"/>
+          </a:xfrm>
+          <a:prstGeom prst="rect">
+            <a:avLst/>
+          </a:prstGeom>
+          <a:noFill/>
+        </p:spPr>
+        <p:txBody>
+          <a:bodyPr wrap="square" lIns="45720" rIns="45720" tIns="18288" bIns="18288">
+            <a:spAutoFit/>
+          </a:bodyPr>
+          <a:lstStyle/>
+          <a:p>
+            <a:pPr algn="r">
+              <a:defRPr sz="1000" b="0">
+                <a:solidFill>
+                  <a:srgbClr val="6B6B6B"/>
+                </a:solidFill>
+                <a:latin typeface="Calibri"/>
+              </a:defRPr>
+            </a:pPr>
+            <a:r>
+              <a:t>2</a:t>
             </a:r>
           </a:p>
         </p:txBody>
@@ -4785,7 +5180,7 @@
     <p:bg>
       <p:bgPr>
         <a:solidFill>
-          <a:srgbClr val="FFFFFF"/>
+          <a:srgbClr val="E6F0EA"/>
         </a:solidFill>
         <a:effectLst/>
       </p:bgPr>
@@ -4805,8 +5200,8 @@
         </p:nvSpPr>
         <p:spPr>
           <a:xfrm>
-            <a:off x="457200" y="274320"/>
-            <a:ext cx="10972800" cy="640080"/>
+            <a:off x="457200" y="365760"/>
+            <a:ext cx="10972800" cy="731520"/>
           </a:xfrm>
           <a:prstGeom prst="rect">
             <a:avLst/>
@@ -4814,21 +5209,21 @@
           <a:noFill/>
         </p:spPr>
         <p:txBody>
-          <a:bodyPr wrap="square">
+          <a:bodyPr wrap="square" lIns="45720" rIns="45720" tIns="18288" bIns="18288">
             <a:spAutoFit/>
           </a:bodyPr>
           <a:lstStyle/>
           <a:p>
             <a:pPr algn="l">
-              <a:defRPr sz="3200" b="1">
-                <a:solidFill>
-                  <a:srgbClr val="2B2B2B"/>
-                </a:solidFill>
-                <a:latin typeface="Calibri"/>
-              </a:defRPr>
-            </a:pPr>
-            <a:r>
-              <a:t>🌡️ La température — Qu'est-ce que c'est?</a:t>
+              <a:defRPr sz="2800" b="1">
+                <a:solidFill>
+                  <a:srgbClr val="006B3F"/>
+                </a:solidFill>
+                <a:latin typeface="Calibri"/>
+              </a:defRPr>
+            </a:pPr>
+            <a:r>
+              <a:t>La température — Qu'est-ce que c'est?</a:t>
             </a:r>
           </a:p>
         </p:txBody>
@@ -4841,8 +5236,8 @@
         </p:nvSpPr>
         <p:spPr>
           <a:xfrm>
-            <a:off x="457200" y="914400"/>
-            <a:ext cx="10972800" cy="457200"/>
+            <a:off x="457200" y="1005840"/>
+            <a:ext cx="10972800" cy="411480"/>
           </a:xfrm>
           <a:prstGeom prst="rect">
             <a:avLst/>
@@ -4850,13 +5245,13 @@
           <a:noFill/>
         </p:spPr>
         <p:txBody>
-          <a:bodyPr wrap="square">
+          <a:bodyPr wrap="square" lIns="45720" rIns="45720" tIns="18288" bIns="18288">
             <a:spAutoFit/>
           </a:bodyPr>
           <a:lstStyle/>
           <a:p>
             <a:pPr algn="l">
-              <a:defRPr sz="1800" b="0">
+              <a:defRPr sz="1500" b="0">
                 <a:solidFill>
                   <a:srgbClr val="6B6B6B"/>
                 </a:solidFill>
@@ -4871,113 +5266,25 @@
       </p:sp>
       <p:sp>
         <p:nvSpPr>
-          <p:cNvPr id="4" name="TextBox 3"/>
-          <p:cNvSpPr txBox="1"/>
-          <p:nvPr/>
-        </p:nvSpPr>
-        <p:spPr>
-          <a:xfrm>
-            <a:off x="457200" y="1554480"/>
-            <a:ext cx="10972800" cy="1371600"/>
-          </a:xfrm>
-          <a:prstGeom prst="rect">
-            <a:avLst/>
-          </a:prstGeom>
-          <a:noFill/>
-        </p:spPr>
-        <p:txBody>
-          <a:bodyPr wrap="square">
-            <a:spAutoFit/>
-          </a:bodyPr>
-          <a:lstStyle/>
-          <a:p>
-            <a:pPr>
-              <a:spcAft>
-                <a:spcPts val="400"/>
-              </a:spcAft>
-              <a:defRPr sz="1400">
-                <a:solidFill>
-                  <a:srgbClr val="2B2B2B"/>
-                </a:solidFill>
-                <a:latin typeface="Calibri"/>
-              </a:defRPr>
-            </a:pPr>
-            <a:r>
-              <a:t>• Température = degré de créativité / hasard dans les réponses</a:t>
-            </a:r>
-          </a:p>
-          <a:p>
-            <a:pPr>
-              <a:spcAft>
-                <a:spcPts val="400"/>
-              </a:spcAft>
-              <a:defRPr sz="1400">
-                <a:solidFill>
-                  <a:srgbClr val="2B2B2B"/>
-                </a:solidFill>
-                <a:latin typeface="Calibri"/>
-              </a:defRPr>
-            </a:pPr>
-            <a:r>
-              <a:t>• M365 Copilot: température basse (0.1-0.3) → fiable, déterministe</a:t>
-            </a:r>
-          </a:p>
-          <a:p>
-            <a:pPr>
-              <a:spcAft>
-                <a:spcPts val="400"/>
-              </a:spcAft>
-              <a:defRPr sz="1400">
-                <a:solidFill>
-                  <a:srgbClr val="2B2B2B"/>
-                </a:solidFill>
-                <a:latin typeface="Calibri"/>
-              </a:defRPr>
-            </a:pPr>
-            <a:r>
-              <a:t>• Think Deeper: température basse + plus d'itérations de raisonnement</a:t>
-            </a:r>
-          </a:p>
-          <a:p>
-            <a:pPr>
-              <a:spcAft>
-                <a:spcPts val="400"/>
-              </a:spcAft>
-              <a:defRPr sz="1400">
-                <a:solidFill>
-                  <a:srgbClr val="2B2B2B"/>
-                </a:solidFill>
-                <a:latin typeface="Calibri"/>
-              </a:defRPr>
-            </a:pPr>
-            <a:r>
-              <a:t>• Vous ne pouvez pas changer ce paramètre — Microsoft le gère</a:t>
-            </a:r>
-          </a:p>
-        </p:txBody>
-      </p:sp>
-      <p:sp>
-        <p:nvSpPr>
-          <p:cNvPr id="5" name="Rectangle 4"/>
+          <p:cNvPr id="4" name="Rectangle 3"/>
           <p:cNvSpPr/>
           <p:nvPr/>
         </p:nvSpPr>
         <p:spPr>
           <a:xfrm>
-            <a:off x="457200" y="3017520"/>
-            <a:ext cx="3383280" cy="3657600"/>
+            <a:off x="457200" y="1508760"/>
+            <a:ext cx="11274552" cy="18288"/>
           </a:xfrm>
           <a:prstGeom prst="rect">
             <a:avLst/>
           </a:prstGeom>
           <a:solidFill>
-            <a:srgbClr val="FFFFFF"/>
+            <a:srgbClr val="00874E"/>
           </a:solidFill>
           <a:ln>
-            <a:solidFill>
-              <a:srgbClr val="E0E0E0"/>
-            </a:solidFill>
+            <a:noFill/>
           </a:ln>
+          <a:effectLst/>
         </p:spPr>
         <p:style>
           <a:lnRef idx="1">
@@ -5003,14 +5310,14 @@
       </p:sp>
       <p:sp>
         <p:nvSpPr>
-          <p:cNvPr id="6" name="TextBox 5"/>
+          <p:cNvPr id="5" name="TextBox 4"/>
           <p:cNvSpPr txBox="1"/>
           <p:nvPr/>
         </p:nvSpPr>
         <p:spPr>
           <a:xfrm>
-            <a:off x="731520" y="3200400"/>
-            <a:ext cx="2834640" cy="457200"/>
+            <a:off x="457200" y="1737360"/>
+            <a:ext cx="10972800" cy="1188720"/>
           </a:xfrm>
           <a:prstGeom prst="rect">
             <a:avLst/>
@@ -5023,175 +5330,81 @@
           </a:bodyPr>
           <a:lstStyle/>
           <a:p>
-            <a:pPr algn="l">
-              <a:defRPr sz="1800" b="1">
-                <a:solidFill>
-                  <a:srgbClr val="0078D4"/>
-                </a:solidFill>
-                <a:latin typeface="Calibri"/>
-              </a:defRPr>
-            </a:pPr>
-            <a:r>
-              <a:t>🧊 Basse (0.1-0.3)</a:t>
-            </a:r>
-          </a:p>
-        </p:txBody>
-      </p:sp>
-      <p:sp>
-        <p:nvSpPr>
-          <p:cNvPr id="7" name="TextBox 6"/>
-          <p:cNvSpPr txBox="1"/>
-          <p:nvPr/>
-        </p:nvSpPr>
-        <p:spPr>
-          <a:xfrm>
-            <a:off x="731520" y="3657600"/>
-            <a:ext cx="2834640" cy="2743200"/>
-          </a:xfrm>
-          <a:prstGeom prst="rect">
-            <a:avLst/>
-          </a:prstGeom>
-          <a:noFill/>
-        </p:spPr>
-        <p:txBody>
-          <a:bodyPr wrap="square">
-            <a:spAutoFit/>
-          </a:bodyPr>
-          <a:lstStyle/>
-          <a:p>
-            <a:pPr>
-              <a:spcAft>
-                <a:spcPts val="400"/>
-              </a:spcAft>
-              <a:defRPr sz="1300">
-                <a:solidFill>
-                  <a:srgbClr val="2B2B2B"/>
-                </a:solidFill>
-                <a:latin typeface="Calibri"/>
-              </a:defRPr>
-            </a:pPr>
-            <a:r>
-              <a:t>Copilot M365</a:t>
-            </a:r>
-          </a:p>
-          <a:p>
-            <a:pPr>
-              <a:spcAft>
-                <a:spcPts val="400"/>
-              </a:spcAft>
-              <a:defRPr sz="1300">
-                <a:solidFill>
-                  <a:srgbClr val="2B2B2B"/>
-                </a:solidFill>
-                <a:latin typeface="Calibri"/>
-              </a:defRPr>
-            </a:pPr>
-          </a:p>
-          <a:p>
-            <a:pPr>
-              <a:spcAft>
-                <a:spcPts val="400"/>
-              </a:spcAft>
-              <a:defRPr sz="1300">
-                <a:solidFill>
-                  <a:srgbClr val="2B2B2B"/>
-                </a:solidFill>
-                <a:latin typeface="Calibri"/>
-              </a:defRPr>
-            </a:pPr>
-            <a:r>
-              <a:t>✅ Réponse fiable</a:t>
-            </a:r>
-          </a:p>
-          <a:p>
-            <a:pPr>
-              <a:spcAft>
-                <a:spcPts val="400"/>
-              </a:spcAft>
-              <a:defRPr sz="1300">
-                <a:solidFill>
-                  <a:srgbClr val="2B2B2B"/>
-                </a:solidFill>
-                <a:latin typeface="Calibri"/>
-              </a:defRPr>
-            </a:pPr>
-            <a:r>
-              <a:t>✅ Déterministe</a:t>
-            </a:r>
-          </a:p>
-          <a:p>
-            <a:pPr>
-              <a:spcAft>
-                <a:spcPts val="400"/>
-              </a:spcAft>
-              <a:defRPr sz="1300">
-                <a:solidFill>
-                  <a:srgbClr val="2B2B2B"/>
-                </a:solidFill>
-                <a:latin typeface="Calibri"/>
-              </a:defRPr>
-            </a:pPr>
-            <a:r>
-              <a:t>✅ Reproductible</a:t>
-            </a:r>
-          </a:p>
-          <a:p>
-            <a:pPr>
-              <a:spcAft>
-                <a:spcPts val="400"/>
-              </a:spcAft>
-              <a:defRPr sz="1300">
-                <a:solidFill>
-                  <a:srgbClr val="2B2B2B"/>
-                </a:solidFill>
-                <a:latin typeface="Calibri"/>
-              </a:defRPr>
-            </a:pPr>
-          </a:p>
-          <a:p>
-            <a:pPr>
-              <a:spcAft>
-                <a:spcPts val="400"/>
-              </a:spcAft>
-              <a:defRPr sz="1300">
-                <a:solidFill>
-                  <a:srgbClr val="2B2B2B"/>
-                </a:solidFill>
-                <a:latin typeface="Calibri"/>
-              </a:defRPr>
-            </a:pPr>
-            <a:r>
-              <a:t>📋 Documents, courriels</a:t>
-            </a:r>
-          </a:p>
-          <a:p>
-            <a:pPr>
-              <a:spcAft>
-                <a:spcPts val="400"/>
-              </a:spcAft>
-              <a:defRPr sz="1300">
-                <a:solidFill>
-                  <a:srgbClr val="2B2B2B"/>
-                </a:solidFill>
-                <a:latin typeface="Calibri"/>
-              </a:defRPr>
-            </a:pPr>
-            <a:r>
-              <a:t>   analyses financières</a:t>
-            </a:r>
-          </a:p>
-        </p:txBody>
-      </p:sp>
-      <p:sp>
-        <p:nvSpPr>
-          <p:cNvPr id="8" name="Rectangle 7"/>
+            <a:pPr>
+              <a:spcAft>
+                <a:spcPts val="400"/>
+              </a:spcAft>
+              <a:defRPr sz="1400">
+                <a:solidFill>
+                  <a:srgbClr val="2B2B2B"/>
+                </a:solidFill>
+                <a:latin typeface="Calibri"/>
+              </a:defRPr>
+            </a:pPr>
+            <a:r>
+              <a:t>• Température = degré de créativité / hasard dans les réponses</a:t>
+            </a:r>
+          </a:p>
+          <a:p>
+            <a:pPr>
+              <a:spcAft>
+                <a:spcPts val="400"/>
+              </a:spcAft>
+              <a:defRPr sz="1400">
+                <a:solidFill>
+                  <a:srgbClr val="2B2B2B"/>
+                </a:solidFill>
+                <a:latin typeface="Calibri"/>
+              </a:defRPr>
+            </a:pPr>
+            <a:r>
+              <a:t>• M365 Copilot: température basse (0.1-0.3) → fiable, déterministe</a:t>
+            </a:r>
+          </a:p>
+          <a:p>
+            <a:pPr>
+              <a:spcAft>
+                <a:spcPts val="400"/>
+              </a:spcAft>
+              <a:defRPr sz="1400">
+                <a:solidFill>
+                  <a:srgbClr val="2B2B2B"/>
+                </a:solidFill>
+                <a:latin typeface="Calibri"/>
+              </a:defRPr>
+            </a:pPr>
+            <a:r>
+              <a:t>• Think Deeper: température basse + plus d'itérations de raisonnement</a:t>
+            </a:r>
+          </a:p>
+          <a:p>
+            <a:pPr>
+              <a:spcAft>
+                <a:spcPts val="400"/>
+              </a:spcAft>
+              <a:defRPr sz="1400">
+                <a:solidFill>
+                  <a:srgbClr val="2B2B2B"/>
+                </a:solidFill>
+                <a:latin typeface="Calibri"/>
+              </a:defRPr>
+            </a:pPr>
+            <a:r>
+              <a:t>• Vous ne pouvez pas changer ce paramètre — Microsoft le gère</a:t>
+            </a:r>
+          </a:p>
+        </p:txBody>
+      </p:sp>
+      <p:sp>
+        <p:nvSpPr>
+          <p:cNvPr id="6" name="Rectangle 5"/>
           <p:cNvSpPr/>
           <p:nvPr/>
         </p:nvSpPr>
         <p:spPr>
           <a:xfrm>
-            <a:off x="4114800" y="3017520"/>
-            <a:ext cx="3383280" cy="3657600"/>
+            <a:off x="457200" y="2926080"/>
+            <a:ext cx="3383280" cy="3291840"/>
           </a:xfrm>
           <a:prstGeom prst="rect">
             <a:avLst/>
@@ -5204,6 +5417,7 @@
               <a:srgbClr val="E0E0E0"/>
             </a:solidFill>
           </a:ln>
+          <a:effectLst/>
         </p:spPr>
         <p:style>
           <a:lnRef idx="1">
@@ -5227,6 +5441,66 @@
           </a:p>
         </p:txBody>
       </p:sp>
+      <p:pic>
+        <p:nvPicPr>
+          <p:cNvPr id="7" name="Picture 6" descr="thermometer-snowflake_00874E_30.png"/>
+          <p:cNvPicPr>
+            <a:picLocks noChangeAspect="1"/>
+          </p:cNvPicPr>
+          <p:nvPr/>
+        </p:nvPicPr>
+        <p:blipFill>
+          <a:blip r:embed="rId3"/>
+          <a:stretch>
+            <a:fillRect/>
+          </a:stretch>
+        </p:blipFill>
+        <p:spPr>
+          <a:xfrm>
+            <a:off x="713232" y="3090672"/>
+            <a:ext cx="292608" cy="292608"/>
+          </a:xfrm>
+          <a:prstGeom prst="rect">
+            <a:avLst/>
+          </a:prstGeom>
+        </p:spPr>
+      </p:pic>
+      <p:sp>
+        <p:nvSpPr>
+          <p:cNvPr id="8" name="TextBox 7"/>
+          <p:cNvSpPr txBox="1"/>
+          <p:nvPr/>
+        </p:nvSpPr>
+        <p:spPr>
+          <a:xfrm>
+            <a:off x="1115568" y="3108960"/>
+            <a:ext cx="2542032" cy="457200"/>
+          </a:xfrm>
+          <a:prstGeom prst="rect">
+            <a:avLst/>
+          </a:prstGeom>
+          <a:noFill/>
+        </p:spPr>
+        <p:txBody>
+          <a:bodyPr wrap="square" lIns="45720" rIns="45720" tIns="18288" bIns="18288">
+            <a:spAutoFit/>
+          </a:bodyPr>
+          <a:lstStyle/>
+          <a:p>
+            <a:pPr algn="l">
+              <a:defRPr sz="1700" b="1">
+                <a:solidFill>
+                  <a:srgbClr val="00874E"/>
+                </a:solidFill>
+                <a:latin typeface="Calibri"/>
+              </a:defRPr>
+            </a:pPr>
+            <a:r>
+              <a:t>Basse (0.1-0.3)</a:t>
+            </a:r>
+          </a:p>
+        </p:txBody>
+      </p:sp>
       <p:sp>
         <p:nvSpPr>
           <p:cNvPr id="9" name="TextBox 8"/>
@@ -5235,8 +5509,8 @@
         </p:nvSpPr>
         <p:spPr>
           <a:xfrm>
-            <a:off x="4389120" y="3200400"/>
-            <a:ext cx="2834640" cy="457200"/>
+            <a:off x="731520" y="3703320"/>
+            <a:ext cx="2834640" cy="2331720"/>
           </a:xfrm>
           <a:prstGeom prst="rect">
             <a:avLst/>
@@ -5249,42 +5523,6 @@
           </a:bodyPr>
           <a:lstStyle/>
           <a:p>
-            <a:pPr algn="l">
-              <a:defRPr sz="1800" b="1">
-                <a:solidFill>
-                  <a:srgbClr val="F59E0B"/>
-                </a:solidFill>
-                <a:latin typeface="Calibri"/>
-              </a:defRPr>
-            </a:pPr>
-            <a:r>
-              <a:t>🌡️ Moyenne (0.3-0.7)</a:t>
-            </a:r>
-          </a:p>
-        </p:txBody>
-      </p:sp>
-      <p:sp>
-        <p:nvSpPr>
-          <p:cNvPr id="10" name="TextBox 9"/>
-          <p:cNvSpPr txBox="1"/>
-          <p:nvPr/>
-        </p:nvSpPr>
-        <p:spPr>
-          <a:xfrm>
-            <a:off x="4389120" y="3657600"/>
-            <a:ext cx="2834640" cy="2743200"/>
-          </a:xfrm>
-          <a:prstGeom prst="rect">
-            <a:avLst/>
-          </a:prstGeom>
-          <a:noFill/>
-        </p:spPr>
-        <p:txBody>
-          <a:bodyPr wrap="square">
-            <a:spAutoFit/>
-          </a:bodyPr>
-          <a:lstStyle/>
-          <a:p>
             <a:pPr>
               <a:spcAft>
                 <a:spcPts val="400"/>
@@ -5297,7 +5535,7 @@
               </a:defRPr>
             </a:pPr>
             <a:r>
-              <a:t>Copilot Web (Quick)</a:t>
+              <a:t>Copilot M365</a:t>
             </a:r>
           </a:p>
           <a:p>
@@ -5326,7 +5564,7 @@
               </a:defRPr>
             </a:pPr>
             <a:r>
-              <a:t>🔄 Un peu de créativité</a:t>
+              <a:t>Réponse fiable</a:t>
             </a:r>
           </a:p>
           <a:p>
@@ -5342,7 +5580,7 @@
               </a:defRPr>
             </a:pPr>
             <a:r>
-              <a:t>✅ Reste fiable</a:t>
+              <a:t>Déterministe</a:t>
             </a:r>
           </a:p>
           <a:p>
@@ -5357,6 +5595,9 @@
                 <a:latin typeface="Calibri"/>
               </a:defRPr>
             </a:pPr>
+            <a:r>
+              <a:t>Reproductible</a:t>
+            </a:r>
           </a:p>
           <a:p>
             <a:pPr>
@@ -5370,9 +5611,6 @@
                 <a:latin typeface="Calibri"/>
               </a:defRPr>
             </a:pPr>
-            <a:r>
-              <a:t>💬 Chat, brainstorming</a:t>
-            </a:r>
           </a:p>
           <a:p>
             <a:pPr>
@@ -5387,21 +5625,37 @@
               </a:defRPr>
             </a:pPr>
             <a:r>
-              <a:t>   idées générales</a:t>
-            </a:r>
-          </a:p>
-        </p:txBody>
-      </p:sp>
-      <p:sp>
-        <p:nvSpPr>
-          <p:cNvPr id="11" name="Rectangle 10"/>
+              <a:t>Documents, courriels</a:t>
+            </a:r>
+          </a:p>
+          <a:p>
+            <a:pPr>
+              <a:spcAft>
+                <a:spcPts val="400"/>
+              </a:spcAft>
+              <a:defRPr sz="1300">
+                <a:solidFill>
+                  <a:srgbClr val="2B2B2B"/>
+                </a:solidFill>
+                <a:latin typeface="Calibri"/>
+              </a:defRPr>
+            </a:pPr>
+            <a:r>
+              <a:t>analyses financières</a:t>
+            </a:r>
+          </a:p>
+        </p:txBody>
+      </p:sp>
+      <p:sp>
+        <p:nvSpPr>
+          <p:cNvPr id="10" name="Rectangle 9"/>
           <p:cNvSpPr/>
           <p:nvPr/>
         </p:nvSpPr>
         <p:spPr>
           <a:xfrm>
-            <a:off x="7772400" y="3017520"/>
-            <a:ext cx="3383280" cy="3657600"/>
+            <a:off x="4114800" y="2926080"/>
+            <a:ext cx="3383280" cy="3291840"/>
           </a:xfrm>
           <a:prstGeom prst="rect">
             <a:avLst/>
@@ -5414,6 +5668,7 @@
               <a:srgbClr val="E0E0E0"/>
             </a:solidFill>
           </a:ln>
+          <a:effectLst/>
         </p:spPr>
         <p:style>
           <a:lnRef idx="1">
@@ -5437,6 +5692,30 @@
           </a:p>
         </p:txBody>
       </p:sp>
+      <p:pic>
+        <p:nvPicPr>
+          <p:cNvPr id="11" name="Picture 10" descr="thermometer_F59E0B_30.png"/>
+          <p:cNvPicPr>
+            <a:picLocks noChangeAspect="1"/>
+          </p:cNvPicPr>
+          <p:nvPr/>
+        </p:nvPicPr>
+        <p:blipFill>
+          <a:blip r:embed="rId4"/>
+          <a:stretch>
+            <a:fillRect/>
+          </a:stretch>
+        </p:blipFill>
+        <p:spPr>
+          <a:xfrm>
+            <a:off x="4370832" y="3090672"/>
+            <a:ext cx="292608" cy="292608"/>
+          </a:xfrm>
+          <a:prstGeom prst="rect">
+            <a:avLst/>
+          </a:prstGeom>
+        </p:spPr>
+      </p:pic>
       <p:sp>
         <p:nvSpPr>
           <p:cNvPr id="12" name="TextBox 11"/>
@@ -5445,8 +5724,44 @@
         </p:nvSpPr>
         <p:spPr>
           <a:xfrm>
-            <a:off x="8046720" y="3200400"/>
-            <a:ext cx="2834640" cy="457200"/>
+            <a:off x="4773168" y="3108960"/>
+            <a:ext cx="2542031" cy="457200"/>
+          </a:xfrm>
+          <a:prstGeom prst="rect">
+            <a:avLst/>
+          </a:prstGeom>
+          <a:noFill/>
+        </p:spPr>
+        <p:txBody>
+          <a:bodyPr wrap="square" lIns="45720" rIns="45720" tIns="18288" bIns="18288">
+            <a:spAutoFit/>
+          </a:bodyPr>
+          <a:lstStyle/>
+          <a:p>
+            <a:pPr algn="l">
+              <a:defRPr sz="1700" b="1">
+                <a:solidFill>
+                  <a:srgbClr val="F59E0B"/>
+                </a:solidFill>
+                <a:latin typeface="Calibri"/>
+              </a:defRPr>
+            </a:pPr>
+            <a:r>
+              <a:t>Moyenne (0.3-0.7)</a:t>
+            </a:r>
+          </a:p>
+        </p:txBody>
+      </p:sp>
+      <p:sp>
+        <p:nvSpPr>
+          <p:cNvPr id="13" name="TextBox 12"/>
+          <p:cNvSpPr txBox="1"/>
+          <p:nvPr/>
+        </p:nvSpPr>
+        <p:spPr>
+          <a:xfrm>
+            <a:off x="4389120" y="3703320"/>
+            <a:ext cx="2834640" cy="2331720"/>
           </a:xfrm>
           <a:prstGeom prst="rect">
             <a:avLst/>
@@ -5459,8 +5774,207 @@
           </a:bodyPr>
           <a:lstStyle/>
           <a:p>
+            <a:pPr>
+              <a:spcAft>
+                <a:spcPts val="400"/>
+              </a:spcAft>
+              <a:defRPr sz="1300">
+                <a:solidFill>
+                  <a:srgbClr val="2B2B2B"/>
+                </a:solidFill>
+                <a:latin typeface="Calibri"/>
+              </a:defRPr>
+            </a:pPr>
+            <a:r>
+              <a:t>Copilot Web (Quick)</a:t>
+            </a:r>
+          </a:p>
+          <a:p>
+            <a:pPr>
+              <a:spcAft>
+                <a:spcPts val="400"/>
+              </a:spcAft>
+              <a:defRPr sz="1300">
+                <a:solidFill>
+                  <a:srgbClr val="2B2B2B"/>
+                </a:solidFill>
+                <a:latin typeface="Calibri"/>
+              </a:defRPr>
+            </a:pPr>
+          </a:p>
+          <a:p>
+            <a:pPr>
+              <a:spcAft>
+                <a:spcPts val="400"/>
+              </a:spcAft>
+              <a:defRPr sz="1300">
+                <a:solidFill>
+                  <a:srgbClr val="2B2B2B"/>
+                </a:solidFill>
+                <a:latin typeface="Calibri"/>
+              </a:defRPr>
+            </a:pPr>
+            <a:r>
+              <a:t>Un peu de créativité</a:t>
+            </a:r>
+          </a:p>
+          <a:p>
+            <a:pPr>
+              <a:spcAft>
+                <a:spcPts val="400"/>
+              </a:spcAft>
+              <a:defRPr sz="1300">
+                <a:solidFill>
+                  <a:srgbClr val="2B2B2B"/>
+                </a:solidFill>
+                <a:latin typeface="Calibri"/>
+              </a:defRPr>
+            </a:pPr>
+            <a:r>
+              <a:t>Reste fiable</a:t>
+            </a:r>
+          </a:p>
+          <a:p>
+            <a:pPr>
+              <a:spcAft>
+                <a:spcPts val="400"/>
+              </a:spcAft>
+              <a:defRPr sz="1300">
+                <a:solidFill>
+                  <a:srgbClr val="2B2B2B"/>
+                </a:solidFill>
+                <a:latin typeface="Calibri"/>
+              </a:defRPr>
+            </a:pPr>
+          </a:p>
+          <a:p>
+            <a:pPr>
+              <a:spcAft>
+                <a:spcPts val="400"/>
+              </a:spcAft>
+              <a:defRPr sz="1300">
+                <a:solidFill>
+                  <a:srgbClr val="2B2B2B"/>
+                </a:solidFill>
+                <a:latin typeface="Calibri"/>
+              </a:defRPr>
+            </a:pPr>
+            <a:r>
+              <a:t>Chat, brainstorming</a:t>
+            </a:r>
+          </a:p>
+          <a:p>
+            <a:pPr>
+              <a:spcAft>
+                <a:spcPts val="400"/>
+              </a:spcAft>
+              <a:defRPr sz="1300">
+                <a:solidFill>
+                  <a:srgbClr val="2B2B2B"/>
+                </a:solidFill>
+                <a:latin typeface="Calibri"/>
+              </a:defRPr>
+            </a:pPr>
+            <a:r>
+              <a:t>idées générales</a:t>
+            </a:r>
+          </a:p>
+        </p:txBody>
+      </p:sp>
+      <p:sp>
+        <p:nvSpPr>
+          <p:cNvPr id="14" name="Rectangle 13"/>
+          <p:cNvSpPr/>
+          <p:nvPr/>
+        </p:nvSpPr>
+        <p:spPr>
+          <a:xfrm>
+            <a:off x="7772400" y="2926080"/>
+            <a:ext cx="3383280" cy="3291840"/>
+          </a:xfrm>
+          <a:prstGeom prst="rect">
+            <a:avLst/>
+          </a:prstGeom>
+          <a:solidFill>
+            <a:srgbClr val="FFFFFF"/>
+          </a:solidFill>
+          <a:ln>
+            <a:solidFill>
+              <a:srgbClr val="E0E0E0"/>
+            </a:solidFill>
+          </a:ln>
+          <a:effectLst/>
+        </p:spPr>
+        <p:style>
+          <a:lnRef idx="1">
+            <a:schemeClr val="accent1"/>
+          </a:lnRef>
+          <a:fillRef idx="3">
+            <a:schemeClr val="accent1"/>
+          </a:fillRef>
+          <a:effectRef idx="2">
+            <a:schemeClr val="accent1"/>
+          </a:effectRef>
+          <a:fontRef idx="minor">
+            <a:schemeClr val="lt1"/>
+          </a:fontRef>
+        </p:style>
+        <p:txBody>
+          <a:bodyPr rtlCol="0" anchor="ctr"/>
+          <a:lstStyle/>
+          <a:p>
+            <a:pPr algn="ctr"/>
+          </a:p>
+        </p:txBody>
+      </p:sp>
+      <p:pic>
+        <p:nvPicPr>
+          <p:cNvPr id="15" name="Picture 14" descr="flame_EF4444_30.png"/>
+          <p:cNvPicPr>
+            <a:picLocks noChangeAspect="1"/>
+          </p:cNvPicPr>
+          <p:nvPr/>
+        </p:nvPicPr>
+        <p:blipFill>
+          <a:blip r:embed="rId5"/>
+          <a:stretch>
+            <a:fillRect/>
+          </a:stretch>
+        </p:blipFill>
+        <p:spPr>
+          <a:xfrm>
+            <a:off x="8028431" y="3090672"/>
+            <a:ext cx="292608" cy="292608"/>
+          </a:xfrm>
+          <a:prstGeom prst="rect">
+            <a:avLst/>
+          </a:prstGeom>
+        </p:spPr>
+      </p:pic>
+      <p:sp>
+        <p:nvSpPr>
+          <p:cNvPr id="16" name="TextBox 15"/>
+          <p:cNvSpPr txBox="1"/>
+          <p:nvPr/>
+        </p:nvSpPr>
+        <p:spPr>
+          <a:xfrm>
+            <a:off x="8430767" y="3108960"/>
+            <a:ext cx="2542032" cy="457200"/>
+          </a:xfrm>
+          <a:prstGeom prst="rect">
+            <a:avLst/>
+          </a:prstGeom>
+          <a:noFill/>
+        </p:spPr>
+        <p:txBody>
+          <a:bodyPr wrap="square" lIns="45720" rIns="45720" tIns="18288" bIns="18288">
+            <a:spAutoFit/>
+          </a:bodyPr>
+          <a:lstStyle/>
+          <a:p>
             <a:pPr algn="l">
-              <a:defRPr sz="1800" b="1">
+              <a:defRPr sz="1700" b="1">
                 <a:solidFill>
                   <a:srgbClr val="EF4444"/>
                 </a:solidFill>
@@ -5468,21 +5982,21 @@
               </a:defRPr>
             </a:pPr>
             <a:r>
-              <a:t>🔥 Haute (0.7-1.0+)</a:t>
-            </a:r>
-          </a:p>
-        </p:txBody>
-      </p:sp>
-      <p:sp>
-        <p:nvSpPr>
-          <p:cNvPr id="13" name="TextBox 12"/>
+              <a:t>Haute (0.7-1.0+)</a:t>
+            </a:r>
+          </a:p>
+        </p:txBody>
+      </p:sp>
+      <p:sp>
+        <p:nvSpPr>
+          <p:cNvPr id="17" name="TextBox 16"/>
           <p:cNvSpPr txBox="1"/>
           <p:nvPr/>
         </p:nvSpPr>
         <p:spPr>
           <a:xfrm>
-            <a:off x="8046720" y="3657600"/>
-            <a:ext cx="2834640" cy="2743200"/>
+            <a:off x="8046720" y="3703320"/>
+            <a:ext cx="2834640" cy="2331720"/>
           </a:xfrm>
           <a:prstGeom prst="rect">
             <a:avLst/>
@@ -5536,7 +6050,7 @@
               </a:defRPr>
             </a:pPr>
             <a:r>
-              <a:t>❌ Risque d'hallucination</a:t>
+              <a:t>Risque d'hallucination</a:t>
             </a:r>
           </a:p>
           <a:p>
@@ -5552,7 +6066,7 @@
               </a:defRPr>
             </a:pPr>
             <a:r>
-              <a:t>❌ Réponses imprévisibles</a:t>
+              <a:t>Réponses imprévisibles</a:t>
             </a:r>
           </a:p>
           <a:p>
@@ -5581,7 +6095,7 @@
               </a:defRPr>
             </a:pPr>
             <a:r>
-              <a:t>🎨 Création artistique</a:t>
+              <a:t>Création artistique</a:t>
             </a:r>
           </a:p>
           <a:p>
@@ -5597,7 +6111,123 @@
               </a:defRPr>
             </a:pPr>
             <a:r>
-              <a:t>   (hors cadre M365)</a:t>
+              <a:t>(hors cadre M365)</a:t>
+            </a:r>
+          </a:p>
+        </p:txBody>
+      </p:sp>
+      <p:sp>
+        <p:nvSpPr>
+          <p:cNvPr id="18" name="Rectangle 17"/>
+          <p:cNvSpPr/>
+          <p:nvPr/>
+        </p:nvSpPr>
+        <p:spPr>
+          <a:xfrm>
+            <a:off x="457200" y="6446520"/>
+            <a:ext cx="11274552" cy="13716"/>
+          </a:xfrm>
+          <a:prstGeom prst="rect">
+            <a:avLst/>
+          </a:prstGeom>
+          <a:solidFill>
+            <a:srgbClr val="00874E"/>
+          </a:solidFill>
+          <a:ln>
+            <a:noFill/>
+          </a:ln>
+          <a:effectLst/>
+        </p:spPr>
+        <p:style>
+          <a:lnRef idx="1">
+            <a:schemeClr val="accent1"/>
+          </a:lnRef>
+          <a:fillRef idx="3">
+            <a:schemeClr val="accent1"/>
+          </a:fillRef>
+          <a:effectRef idx="2">
+            <a:schemeClr val="accent1"/>
+          </a:effectRef>
+          <a:fontRef idx="minor">
+            <a:schemeClr val="lt1"/>
+          </a:fontRef>
+        </p:style>
+        <p:txBody>
+          <a:bodyPr rtlCol="0" anchor="ctr"/>
+          <a:lstStyle/>
+          <a:p>
+            <a:pPr algn="ctr"/>
+          </a:p>
+        </p:txBody>
+      </p:sp>
+      <p:sp>
+        <p:nvSpPr>
+          <p:cNvPr id="19" name="TextBox 18"/>
+          <p:cNvSpPr txBox="1"/>
+          <p:nvPr/>
+        </p:nvSpPr>
+        <p:spPr>
+          <a:xfrm>
+            <a:off x="457200" y="6537960"/>
+            <a:ext cx="5486400" cy="274320"/>
+          </a:xfrm>
+          <a:prstGeom prst="rect">
+            <a:avLst/>
+          </a:prstGeom>
+          <a:noFill/>
+        </p:spPr>
+        <p:txBody>
+          <a:bodyPr wrap="square" lIns="45720" rIns="45720" tIns="18288" bIns="18288">
+            <a:spAutoFit/>
+          </a:bodyPr>
+          <a:lstStyle/>
+          <a:p>
+            <a:pPr algn="l">
+              <a:defRPr sz="1000" b="0">
+                <a:solidFill>
+                  <a:srgbClr val="6B6B6B"/>
+                </a:solidFill>
+                <a:latin typeface="Calibri"/>
+              </a:defRPr>
+            </a:pPr>
+            <a:r>
+              <a:t>La minute Copilot</a:t>
+            </a:r>
+          </a:p>
+        </p:txBody>
+      </p:sp>
+      <p:sp>
+        <p:nvSpPr>
+          <p:cNvPr id="20" name="TextBox 19"/>
+          <p:cNvSpPr txBox="1"/>
+          <p:nvPr/>
+        </p:nvSpPr>
+        <p:spPr>
+          <a:xfrm>
+            <a:off x="10972800" y="6537960"/>
+            <a:ext cx="822960" cy="274320"/>
+          </a:xfrm>
+          <a:prstGeom prst="rect">
+            <a:avLst/>
+          </a:prstGeom>
+          <a:noFill/>
+        </p:spPr>
+        <p:txBody>
+          <a:bodyPr wrap="square" lIns="45720" rIns="45720" tIns="18288" bIns="18288">
+            <a:spAutoFit/>
+          </a:bodyPr>
+          <a:lstStyle/>
+          <a:p>
+            <a:pPr algn="r">
+              <a:defRPr sz="1000" b="0">
+                <a:solidFill>
+                  <a:srgbClr val="6B6B6B"/>
+                </a:solidFill>
+                <a:latin typeface="Calibri"/>
+              </a:defRPr>
+            </a:pPr>
+            <a:r>
+              <a:t>3</a:t>
             </a:r>
           </a:p>
         </p:txBody>
@@ -5616,7 +6246,7 @@
     <p:bg>
       <p:bgPr>
         <a:solidFill>
-          <a:srgbClr val="FFFFFF"/>
+          <a:srgbClr val="E6F0EA"/>
         </a:solidFill>
         <a:effectLst/>
       </p:bgPr>
@@ -5636,8 +6266,8 @@
         </p:nvSpPr>
         <p:spPr>
           <a:xfrm>
-            <a:off x="457200" y="274320"/>
-            <a:ext cx="10972800" cy="640080"/>
+            <a:off x="457200" y="365760"/>
+            <a:ext cx="10972800" cy="731520"/>
           </a:xfrm>
           <a:prstGeom prst="rect">
             <a:avLst/>
@@ -5645,21 +6275,21 @@
           <a:noFill/>
         </p:spPr>
         <p:txBody>
-          <a:bodyPr wrap="square">
+          <a:bodyPr wrap="square" lIns="45720" rIns="45720" tIns="18288" bIns="18288">
             <a:spAutoFit/>
           </a:bodyPr>
           <a:lstStyle/>
           <a:p>
             <a:pPr algn="l">
-              <a:defRPr sz="3200" b="1">
-                <a:solidFill>
-                  <a:srgbClr val="2B2B2B"/>
-                </a:solidFill>
-                <a:latin typeface="Calibri"/>
-              </a:defRPr>
-            </a:pPr>
-            <a:r>
-              <a:t>⚡ Cache et Tokens — La mécanique interne</a:t>
+              <a:defRPr sz="2800" b="1">
+                <a:solidFill>
+                  <a:srgbClr val="006B3F"/>
+                </a:solidFill>
+                <a:latin typeface="Calibri"/>
+              </a:defRPr>
+            </a:pPr>
+            <a:r>
+              <a:t>Cache et Tokens — La mécanique interne</a:t>
             </a:r>
           </a:p>
         </p:txBody>
@@ -5672,8 +6302,8 @@
         </p:nvSpPr>
         <p:spPr>
           <a:xfrm>
-            <a:off x="457200" y="914400"/>
-            <a:ext cx="10972800" cy="457200"/>
+            <a:off x="457200" y="1005840"/>
+            <a:ext cx="10972800" cy="411480"/>
           </a:xfrm>
           <a:prstGeom prst="rect">
             <a:avLst/>
@@ -5681,13 +6311,13 @@
           <a:noFill/>
         </p:spPr>
         <p:txBody>
-          <a:bodyPr wrap="square">
+          <a:bodyPr wrap="square" lIns="45720" rIns="45720" tIns="18288" bIns="18288">
             <a:spAutoFit/>
           </a:bodyPr>
           <a:lstStyle/>
           <a:p>
             <a:pPr algn="l">
-              <a:defRPr sz="1800" b="0">
+              <a:defRPr sz="1500" b="0">
                 <a:solidFill>
                   <a:srgbClr val="6B6B6B"/>
                 </a:solidFill>
@@ -5702,113 +6332,25 @@
       </p:sp>
       <p:sp>
         <p:nvSpPr>
-          <p:cNvPr id="4" name="TextBox 3"/>
-          <p:cNvSpPr txBox="1"/>
-          <p:nvPr/>
-        </p:nvSpPr>
-        <p:spPr>
-          <a:xfrm>
-            <a:off x="457200" y="1554480"/>
-            <a:ext cx="10972800" cy="1371600"/>
-          </a:xfrm>
-          <a:prstGeom prst="rect">
-            <a:avLst/>
-          </a:prstGeom>
-          <a:noFill/>
-        </p:spPr>
-        <p:txBody>
-          <a:bodyPr wrap="square">
-            <a:spAutoFit/>
-          </a:bodyPr>
-          <a:lstStyle/>
-          <a:p>
-            <a:pPr>
-              <a:spcAft>
-                <a:spcPts val="400"/>
-              </a:spcAft>
-              <a:defRPr sz="1400">
-                <a:solidFill>
-                  <a:srgbClr val="2B2B2B"/>
-                </a:solidFill>
-                <a:latin typeface="Calibri"/>
-              </a:defRPr>
-            </a:pPr>
-            <a:r>
-              <a:t>• Cache: les réponses aux prompts similaires sont réutilisées (tenant isolé)</a:t>
-            </a:r>
-          </a:p>
-          <a:p>
-            <a:pPr>
-              <a:spcAft>
-                <a:spcPts val="400"/>
-              </a:spcAft>
-              <a:defRPr sz="1400">
-                <a:solidFill>
-                  <a:srgbClr val="2B2B2B"/>
-                </a:solidFill>
-                <a:latin typeface="Calibri"/>
-              </a:defRPr>
-            </a:pPr>
-            <a:r>
-              <a:t>• Limite de tokens: 16K à 128K selon modèle (métaprompt inclus)</a:t>
-            </a:r>
-          </a:p>
-          <a:p>
-            <a:pPr>
-              <a:spcAft>
-                <a:spcPts val="400"/>
-              </a:spcAft>
-              <a:defRPr sz="1400">
-                <a:solidFill>
-                  <a:srgbClr val="2B2B2B"/>
-                </a:solidFill>
-                <a:latin typeface="Calibri"/>
-              </a:defRPr>
-            </a:pPr>
-            <a:r>
-              <a:t>• Une partie du contexte est perdue si le total dépasse la limite</a:t>
-            </a:r>
-          </a:p>
-          <a:p>
-            <a:pPr>
-              <a:spcAft>
-                <a:spcPts val="400"/>
-              </a:spcAft>
-              <a:defRPr sz="1400">
-                <a:solidFill>
-                  <a:srgbClr val="2B2B2B"/>
-                </a:solidFill>
-                <a:latin typeface="Calibri"/>
-              </a:defRPr>
-            </a:pPr>
-            <a:r>
-              <a:t>• Les tokens sont comptés en entrée + sortie = coût par requête</a:t>
-            </a:r>
-          </a:p>
-        </p:txBody>
-      </p:sp>
-      <p:sp>
-        <p:nvSpPr>
-          <p:cNvPr id="5" name="Rectangle 4"/>
+          <p:cNvPr id="4" name="Rectangle 3"/>
           <p:cNvSpPr/>
           <p:nvPr/>
         </p:nvSpPr>
         <p:spPr>
           <a:xfrm>
-            <a:off x="457200" y="3017520"/>
-            <a:ext cx="5212080" cy="3657600"/>
+            <a:off x="457200" y="1508760"/>
+            <a:ext cx="11274552" cy="18288"/>
           </a:xfrm>
           <a:prstGeom prst="rect">
             <a:avLst/>
           </a:prstGeom>
           <a:solidFill>
-            <a:srgbClr val="FFFFFF"/>
+            <a:srgbClr val="00874E"/>
           </a:solidFill>
           <a:ln>
-            <a:solidFill>
-              <a:srgbClr val="E0E0E0"/>
-            </a:solidFill>
+            <a:noFill/>
           </a:ln>
+          <a:effectLst/>
         </p:spPr>
         <p:style>
           <a:lnRef idx="1">
@@ -5834,14 +6376,14 @@
       </p:sp>
       <p:sp>
         <p:nvSpPr>
-          <p:cNvPr id="6" name="TextBox 5"/>
+          <p:cNvPr id="5" name="TextBox 4"/>
           <p:cNvSpPr txBox="1"/>
           <p:nvPr/>
         </p:nvSpPr>
         <p:spPr>
           <a:xfrm>
-            <a:off x="731520" y="3200400"/>
-            <a:ext cx="4663440" cy="457200"/>
+            <a:off x="457200" y="1737360"/>
+            <a:ext cx="10972800" cy="1188720"/>
           </a:xfrm>
           <a:prstGeom prst="rect">
             <a:avLst/>
@@ -5854,220 +6396,81 @@
           </a:bodyPr>
           <a:lstStyle/>
           <a:p>
-            <a:pPr algn="l">
-              <a:defRPr sz="1800" b="1">
-                <a:solidFill>
-                  <a:srgbClr val="0078D4"/>
-                </a:solidFill>
-                <a:latin typeface="Calibri"/>
-              </a:defRPr>
-            </a:pPr>
-            <a:r>
-              <a:t>💾 Cache serveur</a:t>
-            </a:r>
-          </a:p>
-        </p:txBody>
-      </p:sp>
-      <p:sp>
-        <p:nvSpPr>
-          <p:cNvPr id="7" name="TextBox 6"/>
-          <p:cNvSpPr txBox="1"/>
-          <p:nvPr/>
-        </p:nvSpPr>
-        <p:spPr>
-          <a:xfrm>
-            <a:off x="731520" y="3657600"/>
-            <a:ext cx="4663440" cy="2743200"/>
-          </a:xfrm>
-          <a:prstGeom prst="rect">
-            <a:avLst/>
-          </a:prstGeom>
-          <a:noFill/>
-        </p:spPr>
-        <p:txBody>
-          <a:bodyPr wrap="square">
-            <a:spAutoFit/>
-          </a:bodyPr>
-          <a:lstStyle/>
-          <a:p>
-            <a:pPr>
-              <a:spcAft>
-                <a:spcPts val="400"/>
-              </a:spcAft>
-              <a:defRPr sz="1300">
-                <a:solidFill>
-                  <a:srgbClr val="2B2B2B"/>
-                </a:solidFill>
-                <a:latin typeface="Calibri"/>
-              </a:defRPr>
-            </a:pPr>
-            <a:r>
-              <a:t>🔹 Même prompt + contexte</a:t>
-            </a:r>
-          </a:p>
-          <a:p>
-            <a:pPr>
-              <a:spcAft>
-                <a:spcPts val="400"/>
-              </a:spcAft>
-              <a:defRPr sz="1300">
-                <a:solidFill>
-                  <a:srgbClr val="2B2B2B"/>
-                </a:solidFill>
-                <a:latin typeface="Calibri"/>
-              </a:defRPr>
-            </a:pPr>
-            <a:r>
-              <a:t>   = même résultat en cache</a:t>
-            </a:r>
-          </a:p>
-          <a:p>
-            <a:pPr>
-              <a:spcAft>
-                <a:spcPts val="400"/>
-              </a:spcAft>
-              <a:defRPr sz="1300">
-                <a:solidFill>
-                  <a:srgbClr val="2B2B2B"/>
-                </a:solidFill>
-                <a:latin typeface="Calibri"/>
-              </a:defRPr>
-            </a:pPr>
-          </a:p>
-          <a:p>
-            <a:pPr>
-              <a:spcAft>
-                <a:spcPts val="400"/>
-              </a:spcAft>
-              <a:defRPr sz="1300">
-                <a:solidFill>
-                  <a:srgbClr val="2B2B2B"/>
-                </a:solidFill>
-                <a:latin typeface="Calibri"/>
-              </a:defRPr>
-            </a:pPr>
-            <a:r>
-              <a:t>🔹 Par tenant uniquement</a:t>
-            </a:r>
-          </a:p>
-          <a:p>
-            <a:pPr>
-              <a:spcAft>
-                <a:spcPts val="400"/>
-              </a:spcAft>
-              <a:defRPr sz="1300">
-                <a:solidFill>
-                  <a:srgbClr val="2B2B2B"/>
-                </a:solidFill>
-                <a:latin typeface="Calibri"/>
-              </a:defRPr>
-            </a:pPr>
-            <a:r>
-              <a:t>   (jamais entre clients)</a:t>
-            </a:r>
-          </a:p>
-          <a:p>
-            <a:pPr>
-              <a:spcAft>
-                <a:spcPts val="400"/>
-              </a:spcAft>
-              <a:defRPr sz="1300">
-                <a:solidFill>
-                  <a:srgbClr val="2B2B2B"/>
-                </a:solidFill>
-                <a:latin typeface="Calibri"/>
-              </a:defRPr>
-            </a:pPr>
-          </a:p>
-          <a:p>
-            <a:pPr>
-              <a:spcAft>
-                <a:spcPts val="400"/>
-              </a:spcAft>
-              <a:defRPr sz="1300">
-                <a:solidFill>
-                  <a:srgbClr val="2B2B2B"/>
-                </a:solidFill>
-                <a:latin typeface="Calibri"/>
-              </a:defRPr>
-            </a:pPr>
-            <a:r>
-              <a:t>🔹 Accélère les réponses</a:t>
-            </a:r>
-          </a:p>
-          <a:p>
-            <a:pPr>
-              <a:spcAft>
-                <a:spcPts val="400"/>
-              </a:spcAft>
-              <a:defRPr sz="1300">
-                <a:solidFill>
-                  <a:srgbClr val="2B2B2B"/>
-                </a:solidFill>
-                <a:latin typeface="Calibri"/>
-              </a:defRPr>
-            </a:pPr>
-            <a:r>
-              <a:t>   fréquentes</a:t>
-            </a:r>
-          </a:p>
-          <a:p>
-            <a:pPr>
-              <a:spcAft>
-                <a:spcPts val="400"/>
-              </a:spcAft>
-              <a:defRPr sz="1300">
-                <a:solidFill>
-                  <a:srgbClr val="2B2B2B"/>
-                </a:solidFill>
-                <a:latin typeface="Calibri"/>
-              </a:defRPr>
-            </a:pPr>
-          </a:p>
-          <a:p>
-            <a:pPr>
-              <a:spcAft>
-                <a:spcPts val="400"/>
-              </a:spcAft>
-              <a:defRPr sz="1300">
-                <a:solidFill>
-                  <a:srgbClr val="2B2B2B"/>
-                </a:solidFill>
-                <a:latin typeface="Calibri"/>
-              </a:defRPr>
-            </a:pPr>
-            <a:r>
-              <a:t>✅ Sécurité: pas de fuite</a:t>
-            </a:r>
-          </a:p>
-          <a:p>
-            <a:pPr>
-              <a:spcAft>
-                <a:spcPts val="400"/>
-              </a:spcAft>
-              <a:defRPr sz="1300">
-                <a:solidFill>
-                  <a:srgbClr val="2B2B2B"/>
-                </a:solidFill>
-                <a:latin typeface="Calibri"/>
-              </a:defRPr>
-            </a:pPr>
-            <a:r>
-              <a:t>   entre organisations</a:t>
-            </a:r>
-          </a:p>
-        </p:txBody>
-      </p:sp>
-      <p:sp>
-        <p:nvSpPr>
-          <p:cNvPr id="8" name="Rectangle 7"/>
+            <a:pPr>
+              <a:spcAft>
+                <a:spcPts val="400"/>
+              </a:spcAft>
+              <a:defRPr sz="1400">
+                <a:solidFill>
+                  <a:srgbClr val="2B2B2B"/>
+                </a:solidFill>
+                <a:latin typeface="Calibri"/>
+              </a:defRPr>
+            </a:pPr>
+            <a:r>
+              <a:t>• Cache: les réponses aux prompts similaires sont réutilisées (tenant isolé)</a:t>
+            </a:r>
+          </a:p>
+          <a:p>
+            <a:pPr>
+              <a:spcAft>
+                <a:spcPts val="400"/>
+              </a:spcAft>
+              <a:defRPr sz="1400">
+                <a:solidFill>
+                  <a:srgbClr val="2B2B2B"/>
+                </a:solidFill>
+                <a:latin typeface="Calibri"/>
+              </a:defRPr>
+            </a:pPr>
+            <a:r>
+              <a:t>• Limite de tokens: 16K à 128K selon modèle (métaprompt inclus)</a:t>
+            </a:r>
+          </a:p>
+          <a:p>
+            <a:pPr>
+              <a:spcAft>
+                <a:spcPts val="400"/>
+              </a:spcAft>
+              <a:defRPr sz="1400">
+                <a:solidFill>
+                  <a:srgbClr val="2B2B2B"/>
+                </a:solidFill>
+                <a:latin typeface="Calibri"/>
+              </a:defRPr>
+            </a:pPr>
+            <a:r>
+              <a:t>• Une partie du contexte est perdue si le total dépasse la limite</a:t>
+            </a:r>
+          </a:p>
+          <a:p>
+            <a:pPr>
+              <a:spcAft>
+                <a:spcPts val="400"/>
+              </a:spcAft>
+              <a:defRPr sz="1400">
+                <a:solidFill>
+                  <a:srgbClr val="2B2B2B"/>
+                </a:solidFill>
+                <a:latin typeface="Calibri"/>
+              </a:defRPr>
+            </a:pPr>
+            <a:r>
+              <a:t>• Les tokens sont comptés en entrée + sortie = coût par requête</a:t>
+            </a:r>
+          </a:p>
+        </p:txBody>
+      </p:sp>
+      <p:sp>
+        <p:nvSpPr>
+          <p:cNvPr id="6" name="Rectangle 5"/>
           <p:cNvSpPr/>
           <p:nvPr/>
         </p:nvSpPr>
         <p:spPr>
           <a:xfrm>
-            <a:off x="5943600" y="3017520"/>
-            <a:ext cx="5212080" cy="3657600"/>
+            <a:off x="457200" y="2926080"/>
+            <a:ext cx="5212080" cy="3291840"/>
           </a:xfrm>
           <a:prstGeom prst="rect">
             <a:avLst/>
@@ -6080,6 +6483,7 @@
               <a:srgbClr val="E0E0E0"/>
             </a:solidFill>
           </a:ln>
+          <a:effectLst/>
         </p:spPr>
         <p:style>
           <a:lnRef idx="1">
@@ -6103,6 +6507,66 @@
           </a:p>
         </p:txBody>
       </p:sp>
+      <p:pic>
+        <p:nvPicPr>
+          <p:cNvPr id="7" name="Picture 6" descr="database_00874E_30.png"/>
+          <p:cNvPicPr>
+            <a:picLocks noChangeAspect="1"/>
+          </p:cNvPicPr>
+          <p:nvPr/>
+        </p:nvPicPr>
+        <p:blipFill>
+          <a:blip r:embed="rId3"/>
+          <a:stretch>
+            <a:fillRect/>
+          </a:stretch>
+        </p:blipFill>
+        <p:spPr>
+          <a:xfrm>
+            <a:off x="713232" y="3090672"/>
+            <a:ext cx="292608" cy="292608"/>
+          </a:xfrm>
+          <a:prstGeom prst="rect">
+            <a:avLst/>
+          </a:prstGeom>
+        </p:spPr>
+      </p:pic>
+      <p:sp>
+        <p:nvSpPr>
+          <p:cNvPr id="8" name="TextBox 7"/>
+          <p:cNvSpPr txBox="1"/>
+          <p:nvPr/>
+        </p:nvSpPr>
+        <p:spPr>
+          <a:xfrm>
+            <a:off x="1115568" y="3108960"/>
+            <a:ext cx="4370832" cy="457200"/>
+          </a:xfrm>
+          <a:prstGeom prst="rect">
+            <a:avLst/>
+          </a:prstGeom>
+          <a:noFill/>
+        </p:spPr>
+        <p:txBody>
+          <a:bodyPr wrap="square" lIns="45720" rIns="45720" tIns="18288" bIns="18288">
+            <a:spAutoFit/>
+          </a:bodyPr>
+          <a:lstStyle/>
+          <a:p>
+            <a:pPr algn="l">
+              <a:defRPr sz="1700" b="1">
+                <a:solidFill>
+                  <a:srgbClr val="00874E"/>
+                </a:solidFill>
+                <a:latin typeface="Calibri"/>
+              </a:defRPr>
+            </a:pPr>
+            <a:r>
+              <a:t>Cache serveur</a:t>
+            </a:r>
+          </a:p>
+        </p:txBody>
+      </p:sp>
       <p:sp>
         <p:nvSpPr>
           <p:cNvPr id="9" name="TextBox 8"/>
@@ -6111,8 +6575,8 @@
         </p:nvSpPr>
         <p:spPr>
           <a:xfrm>
-            <a:off x="6217920" y="3200400"/>
-            <a:ext cx="4663440" cy="457200"/>
+            <a:off x="731520" y="3703320"/>
+            <a:ext cx="4663440" cy="2331720"/>
           </a:xfrm>
           <a:prstGeom prst="rect">
             <a:avLst/>
@@ -6125,30 +6589,290 @@
           </a:bodyPr>
           <a:lstStyle/>
           <a:p>
+            <a:pPr>
+              <a:spcAft>
+                <a:spcPts val="400"/>
+              </a:spcAft>
+              <a:defRPr sz="1300">
+                <a:solidFill>
+                  <a:srgbClr val="2B2B2B"/>
+                </a:solidFill>
+                <a:latin typeface="Calibri"/>
+              </a:defRPr>
+            </a:pPr>
+            <a:r>
+              <a:t>Même prompt + contexte</a:t>
+            </a:r>
+          </a:p>
+          <a:p>
+            <a:pPr>
+              <a:spcAft>
+                <a:spcPts val="400"/>
+              </a:spcAft>
+              <a:defRPr sz="1300">
+                <a:solidFill>
+                  <a:srgbClr val="2B2B2B"/>
+                </a:solidFill>
+                <a:latin typeface="Calibri"/>
+              </a:defRPr>
+            </a:pPr>
+            <a:r>
+              <a:t>= même résultat en cache</a:t>
+            </a:r>
+          </a:p>
+          <a:p>
+            <a:pPr>
+              <a:spcAft>
+                <a:spcPts val="400"/>
+              </a:spcAft>
+              <a:defRPr sz="1300">
+                <a:solidFill>
+                  <a:srgbClr val="2B2B2B"/>
+                </a:solidFill>
+                <a:latin typeface="Calibri"/>
+              </a:defRPr>
+            </a:pPr>
+          </a:p>
+          <a:p>
+            <a:pPr>
+              <a:spcAft>
+                <a:spcPts val="400"/>
+              </a:spcAft>
+              <a:defRPr sz="1300">
+                <a:solidFill>
+                  <a:srgbClr val="2B2B2B"/>
+                </a:solidFill>
+                <a:latin typeface="Calibri"/>
+              </a:defRPr>
+            </a:pPr>
+            <a:r>
+              <a:t>Par tenant uniquement</a:t>
+            </a:r>
+          </a:p>
+          <a:p>
+            <a:pPr>
+              <a:spcAft>
+                <a:spcPts val="400"/>
+              </a:spcAft>
+              <a:defRPr sz="1300">
+                <a:solidFill>
+                  <a:srgbClr val="2B2B2B"/>
+                </a:solidFill>
+                <a:latin typeface="Calibri"/>
+              </a:defRPr>
+            </a:pPr>
+            <a:r>
+              <a:t>(jamais entre clients)</a:t>
+            </a:r>
+          </a:p>
+          <a:p>
+            <a:pPr>
+              <a:spcAft>
+                <a:spcPts val="400"/>
+              </a:spcAft>
+              <a:defRPr sz="1300">
+                <a:solidFill>
+                  <a:srgbClr val="2B2B2B"/>
+                </a:solidFill>
+                <a:latin typeface="Calibri"/>
+              </a:defRPr>
+            </a:pPr>
+          </a:p>
+          <a:p>
+            <a:pPr>
+              <a:spcAft>
+                <a:spcPts val="400"/>
+              </a:spcAft>
+              <a:defRPr sz="1300">
+                <a:solidFill>
+                  <a:srgbClr val="2B2B2B"/>
+                </a:solidFill>
+                <a:latin typeface="Calibri"/>
+              </a:defRPr>
+            </a:pPr>
+            <a:r>
+              <a:t>Accélère les réponses</a:t>
+            </a:r>
+          </a:p>
+          <a:p>
+            <a:pPr>
+              <a:spcAft>
+                <a:spcPts val="400"/>
+              </a:spcAft>
+              <a:defRPr sz="1300">
+                <a:solidFill>
+                  <a:srgbClr val="2B2B2B"/>
+                </a:solidFill>
+                <a:latin typeface="Calibri"/>
+              </a:defRPr>
+            </a:pPr>
+            <a:r>
+              <a:t>fréquentes</a:t>
+            </a:r>
+          </a:p>
+          <a:p>
+            <a:pPr>
+              <a:spcAft>
+                <a:spcPts val="400"/>
+              </a:spcAft>
+              <a:defRPr sz="1300">
+                <a:solidFill>
+                  <a:srgbClr val="2B2B2B"/>
+                </a:solidFill>
+                <a:latin typeface="Calibri"/>
+              </a:defRPr>
+            </a:pPr>
+          </a:p>
+          <a:p>
+            <a:pPr>
+              <a:spcAft>
+                <a:spcPts val="400"/>
+              </a:spcAft>
+              <a:defRPr sz="1300">
+                <a:solidFill>
+                  <a:srgbClr val="2B2B2B"/>
+                </a:solidFill>
+                <a:latin typeface="Calibri"/>
+              </a:defRPr>
+            </a:pPr>
+            <a:r>
+              <a:t>Sécurité: pas de fuite</a:t>
+            </a:r>
+          </a:p>
+          <a:p>
+            <a:pPr>
+              <a:spcAft>
+                <a:spcPts val="400"/>
+              </a:spcAft>
+              <a:defRPr sz="1300">
+                <a:solidFill>
+                  <a:srgbClr val="2B2B2B"/>
+                </a:solidFill>
+                <a:latin typeface="Calibri"/>
+              </a:defRPr>
+            </a:pPr>
+            <a:r>
+              <a:t>entre organisations</a:t>
+            </a:r>
+          </a:p>
+        </p:txBody>
+      </p:sp>
+      <p:sp>
+        <p:nvSpPr>
+          <p:cNvPr id="10" name="Rectangle 9"/>
+          <p:cNvSpPr/>
+          <p:nvPr/>
+        </p:nvSpPr>
+        <p:spPr>
+          <a:xfrm>
+            <a:off x="5943600" y="2926080"/>
+            <a:ext cx="5212080" cy="3291840"/>
+          </a:xfrm>
+          <a:prstGeom prst="rect">
+            <a:avLst/>
+          </a:prstGeom>
+          <a:solidFill>
+            <a:srgbClr val="FFFFFF"/>
+          </a:solidFill>
+          <a:ln>
+            <a:solidFill>
+              <a:srgbClr val="E0E0E0"/>
+            </a:solidFill>
+          </a:ln>
+          <a:effectLst/>
+        </p:spPr>
+        <p:style>
+          <a:lnRef idx="1">
+            <a:schemeClr val="accent1"/>
+          </a:lnRef>
+          <a:fillRef idx="3">
+            <a:schemeClr val="accent1"/>
+          </a:fillRef>
+          <a:effectRef idx="2">
+            <a:schemeClr val="accent1"/>
+          </a:effectRef>
+          <a:fontRef idx="minor">
+            <a:schemeClr val="lt1"/>
+          </a:fontRef>
+        </p:style>
+        <p:txBody>
+          <a:bodyPr rtlCol="0" anchor="ctr"/>
+          <a:lstStyle/>
+          <a:p>
+            <a:pPr algn="ctr"/>
+          </a:p>
+        </p:txBody>
+      </p:sp>
+      <p:pic>
+        <p:nvPicPr>
+          <p:cNvPr id="11" name="Picture 10" descr="gauge_00874E_30.png"/>
+          <p:cNvPicPr>
+            <a:picLocks noChangeAspect="1"/>
+          </p:cNvPicPr>
+          <p:nvPr/>
+        </p:nvPicPr>
+        <p:blipFill>
+          <a:blip r:embed="rId4"/>
+          <a:stretch>
+            <a:fillRect/>
+          </a:stretch>
+        </p:blipFill>
+        <p:spPr>
+          <a:xfrm>
+            <a:off x="6199632" y="3090672"/>
+            <a:ext cx="292608" cy="292608"/>
+          </a:xfrm>
+          <a:prstGeom prst="rect">
+            <a:avLst/>
+          </a:prstGeom>
+        </p:spPr>
+      </p:pic>
+      <p:sp>
+        <p:nvSpPr>
+          <p:cNvPr id="12" name="TextBox 11"/>
+          <p:cNvSpPr txBox="1"/>
+          <p:nvPr/>
+        </p:nvSpPr>
+        <p:spPr>
+          <a:xfrm>
+            <a:off x="6601968" y="3108960"/>
+            <a:ext cx="4370831" cy="457200"/>
+          </a:xfrm>
+          <a:prstGeom prst="rect">
+            <a:avLst/>
+          </a:prstGeom>
+          <a:noFill/>
+        </p:spPr>
+        <p:txBody>
+          <a:bodyPr wrap="square" lIns="45720" rIns="45720" tIns="18288" bIns="18288">
+            <a:spAutoFit/>
+          </a:bodyPr>
+          <a:lstStyle/>
+          <a:p>
             <a:pPr algn="l">
-              <a:defRPr sz="1800" b="1">
-                <a:solidFill>
-                  <a:srgbClr val="10B981"/>
-                </a:solidFill>
-                <a:latin typeface="Calibri"/>
-              </a:defRPr>
-            </a:pPr>
-            <a:r>
-              <a:t>🎫 Limites de tokens</a:t>
-            </a:r>
-          </a:p>
-        </p:txBody>
-      </p:sp>
-      <p:sp>
-        <p:nvSpPr>
-          <p:cNvPr id="10" name="TextBox 9"/>
+              <a:defRPr sz="1700" b="1">
+                <a:solidFill>
+                  <a:srgbClr val="00874E"/>
+                </a:solidFill>
+                <a:latin typeface="Calibri"/>
+              </a:defRPr>
+            </a:pPr>
+            <a:r>
+              <a:t>Limites de tokens</a:t>
+            </a:r>
+          </a:p>
+        </p:txBody>
+      </p:sp>
+      <p:sp>
+        <p:nvSpPr>
+          <p:cNvPr id="13" name="TextBox 12"/>
           <p:cNvSpPr txBox="1"/>
           <p:nvPr/>
         </p:nvSpPr>
         <p:spPr>
           <a:xfrm>
-            <a:off x="6217920" y="3657600"/>
-            <a:ext cx="4663440" cy="2743200"/>
+            <a:off x="6217920" y="3703320"/>
+            <a:ext cx="4663440" cy="2331720"/>
           </a:xfrm>
           <a:prstGeom prst="rect">
             <a:avLst/>
@@ -6218,7 +6942,7 @@
               </a:defRPr>
             </a:pPr>
             <a:r>
-              <a:t>  • Métaprompt: ~10K</a:t>
+              <a:t>• Métaprompt: ~10K</a:t>
             </a:r>
           </a:p>
           <a:p>
@@ -6234,7 +6958,7 @@
               </a:defRPr>
             </a:pPr>
             <a:r>
-              <a:t>  • Votre prompt: variable</a:t>
+              <a:t>• Votre prompt: variable</a:t>
             </a:r>
           </a:p>
           <a:p>
@@ -6250,7 +6974,7 @@
               </a:defRPr>
             </a:pPr>
             <a:r>
-              <a:t>  • Contexte SharePoint:</a:t>
+              <a:t>• Contexte SharePoint:</a:t>
             </a:r>
           </a:p>
           <a:p>
@@ -6266,7 +6990,7 @@
               </a:defRPr>
             </a:pPr>
             <a:r>
-              <a:t>    peut être énorme</a:t>
+              <a:t>peut être énorme</a:t>
             </a:r>
           </a:p>
           <a:p>
@@ -6282,7 +7006,7 @@
               </a:defRPr>
             </a:pPr>
             <a:r>
-              <a:t>  • Réponse générée</a:t>
+              <a:t>• Réponse générée</a:t>
             </a:r>
           </a:p>
           <a:p>
@@ -6311,7 +7035,7 @@
               </a:defRPr>
             </a:pPr>
             <a:r>
-              <a:t>💡 Si le doc est trop</a:t>
+              <a:t>Si le doc est trop</a:t>
             </a:r>
           </a:p>
           <a:p>
@@ -6327,7 +7051,7 @@
               </a:defRPr>
             </a:pPr>
             <a:r>
-              <a:t>   long, Copilot le</a:t>
+              <a:t>long, Copilot le</a:t>
             </a:r>
           </a:p>
           <a:p>
@@ -6343,7 +7067,123 @@
               </a:defRPr>
             </a:pPr>
             <a:r>
-              <a:t>   résume d'abord</a:t>
+              <a:t>résume d'abord</a:t>
+            </a:r>
+          </a:p>
+        </p:txBody>
+      </p:sp>
+      <p:sp>
+        <p:nvSpPr>
+          <p:cNvPr id="14" name="Rectangle 13"/>
+          <p:cNvSpPr/>
+          <p:nvPr/>
+        </p:nvSpPr>
+        <p:spPr>
+          <a:xfrm>
+            <a:off x="457200" y="6446520"/>
+            <a:ext cx="11274552" cy="13716"/>
+          </a:xfrm>
+          <a:prstGeom prst="rect">
+            <a:avLst/>
+          </a:prstGeom>
+          <a:solidFill>
+            <a:srgbClr val="00874E"/>
+          </a:solidFill>
+          <a:ln>
+            <a:noFill/>
+          </a:ln>
+          <a:effectLst/>
+        </p:spPr>
+        <p:style>
+          <a:lnRef idx="1">
+            <a:schemeClr val="accent1"/>
+          </a:lnRef>
+          <a:fillRef idx="3">
+            <a:schemeClr val="accent1"/>
+          </a:fillRef>
+          <a:effectRef idx="2">
+            <a:schemeClr val="accent1"/>
+          </a:effectRef>
+          <a:fontRef idx="minor">
+            <a:schemeClr val="lt1"/>
+          </a:fontRef>
+        </p:style>
+        <p:txBody>
+          <a:bodyPr rtlCol="0" anchor="ctr"/>
+          <a:lstStyle/>
+          <a:p>
+            <a:pPr algn="ctr"/>
+          </a:p>
+        </p:txBody>
+      </p:sp>
+      <p:sp>
+        <p:nvSpPr>
+          <p:cNvPr id="15" name="TextBox 14"/>
+          <p:cNvSpPr txBox="1"/>
+          <p:nvPr/>
+        </p:nvSpPr>
+        <p:spPr>
+          <a:xfrm>
+            <a:off x="457200" y="6537960"/>
+            <a:ext cx="5486400" cy="274320"/>
+          </a:xfrm>
+          <a:prstGeom prst="rect">
+            <a:avLst/>
+          </a:prstGeom>
+          <a:noFill/>
+        </p:spPr>
+        <p:txBody>
+          <a:bodyPr wrap="square" lIns="45720" rIns="45720" tIns="18288" bIns="18288">
+            <a:spAutoFit/>
+          </a:bodyPr>
+          <a:lstStyle/>
+          <a:p>
+            <a:pPr algn="l">
+              <a:defRPr sz="1000" b="0">
+                <a:solidFill>
+                  <a:srgbClr val="6B6B6B"/>
+                </a:solidFill>
+                <a:latin typeface="Calibri"/>
+              </a:defRPr>
+            </a:pPr>
+            <a:r>
+              <a:t>La minute Copilot</a:t>
+            </a:r>
+          </a:p>
+        </p:txBody>
+      </p:sp>
+      <p:sp>
+        <p:nvSpPr>
+          <p:cNvPr id="16" name="TextBox 15"/>
+          <p:cNvSpPr txBox="1"/>
+          <p:nvPr/>
+        </p:nvSpPr>
+        <p:spPr>
+          <a:xfrm>
+            <a:off x="10972800" y="6537960"/>
+            <a:ext cx="822960" cy="274320"/>
+          </a:xfrm>
+          <a:prstGeom prst="rect">
+            <a:avLst/>
+          </a:prstGeom>
+          <a:noFill/>
+        </p:spPr>
+        <p:txBody>
+          <a:bodyPr wrap="square" lIns="45720" rIns="45720" tIns="18288" bIns="18288">
+            <a:spAutoFit/>
+          </a:bodyPr>
+          <a:lstStyle/>
+          <a:p>
+            <a:pPr algn="r">
+              <a:defRPr sz="1000" b="0">
+                <a:solidFill>
+                  <a:srgbClr val="6B6B6B"/>
+                </a:solidFill>
+                <a:latin typeface="Calibri"/>
+              </a:defRPr>
+            </a:pPr>
+            <a:r>
+              <a:t>4</a:t>
             </a:r>
           </a:p>
         </p:txBody>
@@ -6362,7 +7202,7 @@
     <p:bg>
       <p:bgPr>
         <a:solidFill>
-          <a:srgbClr val="FFFFFF"/>
+          <a:srgbClr val="E6F0EA"/>
         </a:solidFill>
         <a:effectLst/>
       </p:bgPr>
@@ -6382,8 +7222,8 @@
         </p:nvSpPr>
         <p:spPr>
           <a:xfrm>
-            <a:off x="457200" y="274320"/>
-            <a:ext cx="10972800" cy="640080"/>
+            <a:off x="457200" y="365760"/>
+            <a:ext cx="10972800" cy="731520"/>
           </a:xfrm>
           <a:prstGeom prst="rect">
             <a:avLst/>
@@ -6391,21 +7231,21 @@
           <a:noFill/>
         </p:spPr>
         <p:txBody>
-          <a:bodyPr wrap="square">
+          <a:bodyPr wrap="square" lIns="45720" rIns="45720" tIns="18288" bIns="18288">
             <a:spAutoFit/>
           </a:bodyPr>
           <a:lstStyle/>
           <a:p>
             <a:pPr algn="l">
-              <a:defRPr sz="3200" b="1">
-                <a:solidFill>
-                  <a:srgbClr val="2B2B2B"/>
-                </a:solidFill>
-                <a:latin typeface="Calibri"/>
-              </a:defRPr>
-            </a:pPr>
-            <a:r>
-              <a:t>🛡️ Filtres et Sécurité — Ce qui protège vos données</a:t>
+              <a:defRPr sz="2800" b="1">
+                <a:solidFill>
+                  <a:srgbClr val="006B3F"/>
+                </a:solidFill>
+                <a:latin typeface="Calibri"/>
+              </a:defRPr>
+            </a:pPr>
+            <a:r>
+              <a:t>Filtres et Sécurité — Ce qui protège vos données</a:t>
             </a:r>
           </a:p>
         </p:txBody>
@@ -6418,8 +7258,8 @@
         </p:nvSpPr>
         <p:spPr>
           <a:xfrm>
-            <a:off x="457200" y="914400"/>
-            <a:ext cx="10972800" cy="457200"/>
+            <a:off x="457200" y="1005840"/>
+            <a:ext cx="10972800" cy="411480"/>
           </a:xfrm>
           <a:prstGeom prst="rect">
             <a:avLst/>
@@ -6427,13 +7267,13 @@
           <a:noFill/>
         </p:spPr>
         <p:txBody>
-          <a:bodyPr wrap="square">
+          <a:bodyPr wrap="square" lIns="45720" rIns="45720" tIns="18288" bIns="18288">
             <a:spAutoFit/>
           </a:bodyPr>
           <a:lstStyle/>
           <a:p>
             <a:pPr algn="l">
-              <a:defRPr sz="1800" b="0">
+              <a:defRPr sz="1500" b="0">
                 <a:solidFill>
                   <a:srgbClr val="6B6B6B"/>
                 </a:solidFill>
@@ -6448,113 +7288,25 @@
       </p:sp>
       <p:sp>
         <p:nvSpPr>
-          <p:cNvPr id="4" name="TextBox 3"/>
-          <p:cNvSpPr txBox="1"/>
-          <p:nvPr/>
-        </p:nvSpPr>
-        <p:spPr>
-          <a:xfrm>
-            <a:off x="457200" y="1554480"/>
-            <a:ext cx="10972800" cy="1371600"/>
-          </a:xfrm>
-          <a:prstGeom prst="rect">
-            <a:avLst/>
-          </a:prstGeom>
-          <a:noFill/>
-        </p:spPr>
-        <p:txBody>
-          <a:bodyPr wrap="square">
-            <a:spAutoFit/>
-          </a:bodyPr>
-          <a:lstStyle/>
-          <a:p>
-            <a:pPr>
-              <a:spcAft>
-                <a:spcPts val="400"/>
-              </a:spcAft>
-              <a:defRPr sz="1400">
-                <a:solidFill>
-                  <a:srgbClr val="2B2B2B"/>
-                </a:solidFill>
-                <a:latin typeface="Calibri"/>
-              </a:defRPr>
-            </a:pPr>
-            <a:r>
-              <a:t>• Filtre d'entrée: vérifie votre prompt (injection, contenu dangereux)</a:t>
-            </a:r>
-          </a:p>
-          <a:p>
-            <a:pPr>
-              <a:spcAft>
-                <a:spcPts val="400"/>
-              </a:spcAft>
-              <a:defRPr sz="1400">
-                <a:solidFill>
-                  <a:srgbClr val="2B2B2B"/>
-                </a:solidFill>
-                <a:latin typeface="Calibri"/>
-              </a:defRPr>
-            </a:pPr>
-            <a:r>
-              <a:t>• Détection PII: masque les informations personnelles automatiquement</a:t>
-            </a:r>
-          </a:p>
-          <a:p>
-            <a:pPr>
-              <a:spcAft>
-                <a:spcPts val="400"/>
-              </a:spcAft>
-              <a:defRPr sz="1400">
-                <a:solidFill>
-                  <a:srgbClr val="2B2B2B"/>
-                </a:solidFill>
-                <a:latin typeface="Calibri"/>
-              </a:defRPr>
-            </a:pPr>
-            <a:r>
-              <a:t>• Grounding: vérifie que la réponse est basée sur les sources fournies</a:t>
-            </a:r>
-          </a:p>
-          <a:p>
-            <a:pPr>
-              <a:spcAft>
-                <a:spcPts val="400"/>
-              </a:spcAft>
-              <a:defRPr sz="1400">
-                <a:solidFill>
-                  <a:srgbClr val="2B2B2B"/>
-                </a:solidFill>
-                <a:latin typeface="Calibri"/>
-              </a:defRPr>
-            </a:pPr>
-            <a:r>
-              <a:t>• Filtre de sortie: analyse la réponse avant de vous l'afficher</a:t>
-            </a:r>
-          </a:p>
-        </p:txBody>
-      </p:sp>
-      <p:sp>
-        <p:nvSpPr>
-          <p:cNvPr id="5" name="Rectangle 4"/>
+          <p:cNvPr id="4" name="Rectangle 3"/>
           <p:cNvSpPr/>
           <p:nvPr/>
         </p:nvSpPr>
         <p:spPr>
           <a:xfrm>
-            <a:off x="457200" y="3017520"/>
-            <a:ext cx="2468880" cy="3657600"/>
+            <a:off x="457200" y="1508760"/>
+            <a:ext cx="11274552" cy="18288"/>
           </a:xfrm>
           <a:prstGeom prst="rect">
             <a:avLst/>
           </a:prstGeom>
           <a:solidFill>
-            <a:srgbClr val="FFFFFF"/>
+            <a:srgbClr val="00874E"/>
           </a:solidFill>
           <a:ln>
-            <a:solidFill>
-              <a:srgbClr val="E0E0E0"/>
-            </a:solidFill>
+            <a:noFill/>
           </a:ln>
+          <a:effectLst/>
         </p:spPr>
         <p:style>
           <a:lnRef idx="1">
@@ -6580,14 +7332,14 @@
       </p:sp>
       <p:sp>
         <p:nvSpPr>
-          <p:cNvPr id="6" name="TextBox 5"/>
+          <p:cNvPr id="5" name="TextBox 4"/>
           <p:cNvSpPr txBox="1"/>
           <p:nvPr/>
         </p:nvSpPr>
         <p:spPr>
           <a:xfrm>
-            <a:off x="731520" y="3200400"/>
-            <a:ext cx="1920240" cy="457200"/>
+            <a:off x="457200" y="1737360"/>
+            <a:ext cx="10972800" cy="1188720"/>
           </a:xfrm>
           <a:prstGeom prst="rect">
             <a:avLst/>
@@ -6600,146 +7352,81 @@
           </a:bodyPr>
           <a:lstStyle/>
           <a:p>
-            <a:pPr algn="l">
-              <a:defRPr sz="1800" b="1">
-                <a:solidFill>
-                  <a:srgbClr val="0078D4"/>
-                </a:solidFill>
-                <a:latin typeface="Calibri"/>
-              </a:defRPr>
-            </a:pPr>
-            <a:r>
-              <a:t>🚪 1. Filtre d'entrée</a:t>
-            </a:r>
-          </a:p>
-        </p:txBody>
-      </p:sp>
-      <p:sp>
-        <p:nvSpPr>
-          <p:cNvPr id="7" name="TextBox 6"/>
-          <p:cNvSpPr txBox="1"/>
-          <p:nvPr/>
-        </p:nvSpPr>
-        <p:spPr>
-          <a:xfrm>
-            <a:off x="731520" y="3657600"/>
-            <a:ext cx="1920240" cy="2743200"/>
-          </a:xfrm>
-          <a:prstGeom prst="rect">
-            <a:avLst/>
-          </a:prstGeom>
-          <a:noFill/>
-        </p:spPr>
-        <p:txBody>
-          <a:bodyPr wrap="square">
-            <a:spAutoFit/>
-          </a:bodyPr>
-          <a:lstStyle/>
-          <a:p>
-            <a:pPr>
-              <a:spcAft>
-                <a:spcPts val="400"/>
-              </a:spcAft>
-              <a:defRPr sz="1300">
-                <a:solidFill>
-                  <a:srgbClr val="2B2B2B"/>
-                </a:solidFill>
-                <a:latin typeface="Calibri"/>
-              </a:defRPr>
-            </a:pPr>
-            <a:r>
-              <a:t>Vérifie le prompt avant</a:t>
-            </a:r>
-          </a:p>
-          <a:p>
-            <a:pPr>
-              <a:spcAft>
-                <a:spcPts val="400"/>
-              </a:spcAft>
-              <a:defRPr sz="1300">
-                <a:solidFill>
-                  <a:srgbClr val="2B2B2B"/>
-                </a:solidFill>
-                <a:latin typeface="Calibri"/>
-              </a:defRPr>
-            </a:pPr>
-            <a:r>
-              <a:t>traitement</a:t>
-            </a:r>
-          </a:p>
-          <a:p>
-            <a:pPr>
-              <a:spcAft>
-                <a:spcPts val="400"/>
-              </a:spcAft>
-              <a:defRPr sz="1300">
-                <a:solidFill>
-                  <a:srgbClr val="2B2B2B"/>
-                </a:solidFill>
-                <a:latin typeface="Calibri"/>
-              </a:defRPr>
-            </a:pPr>
-          </a:p>
-          <a:p>
-            <a:pPr>
-              <a:spcAft>
-                <a:spcPts val="400"/>
-              </a:spcAft>
-              <a:defRPr sz="1300">
-                <a:solidFill>
-                  <a:srgbClr val="2B2B2B"/>
-                </a:solidFill>
-                <a:latin typeface="Calibri"/>
-              </a:defRPr>
-            </a:pPr>
-            <a:r>
-              <a:t>🔹 Prompt injection?</a:t>
-            </a:r>
-          </a:p>
-          <a:p>
-            <a:pPr>
-              <a:spcAft>
-                <a:spcPts val="400"/>
-              </a:spcAft>
-              <a:defRPr sz="1300">
-                <a:solidFill>
-                  <a:srgbClr val="2B2B2B"/>
-                </a:solidFill>
-                <a:latin typeface="Calibri"/>
-              </a:defRPr>
-            </a:pPr>
-            <a:r>
-              <a:t>🔹 Contenu dangereux?</a:t>
-            </a:r>
-          </a:p>
-          <a:p>
-            <a:pPr>
-              <a:spcAft>
-                <a:spcPts val="400"/>
-              </a:spcAft>
-              <a:defRPr sz="1300">
-                <a:solidFill>
-                  <a:srgbClr val="2B2B2B"/>
-                </a:solidFill>
-                <a:latin typeface="Calibri"/>
-              </a:defRPr>
-            </a:pPr>
-            <a:r>
-              <a:t>🔹 Demande illégale?</a:t>
-            </a:r>
-          </a:p>
-        </p:txBody>
-      </p:sp>
-      <p:sp>
-        <p:nvSpPr>
-          <p:cNvPr id="8" name="Rectangle 7"/>
+            <a:pPr>
+              <a:spcAft>
+                <a:spcPts val="400"/>
+              </a:spcAft>
+              <a:defRPr sz="1400">
+                <a:solidFill>
+                  <a:srgbClr val="2B2B2B"/>
+                </a:solidFill>
+                <a:latin typeface="Calibri"/>
+              </a:defRPr>
+            </a:pPr>
+            <a:r>
+              <a:t>• Filtre d'entrée: vérifie votre prompt (injection, contenu dangereux)</a:t>
+            </a:r>
+          </a:p>
+          <a:p>
+            <a:pPr>
+              <a:spcAft>
+                <a:spcPts val="400"/>
+              </a:spcAft>
+              <a:defRPr sz="1400">
+                <a:solidFill>
+                  <a:srgbClr val="2B2B2B"/>
+                </a:solidFill>
+                <a:latin typeface="Calibri"/>
+              </a:defRPr>
+            </a:pPr>
+            <a:r>
+              <a:t>• Détection PII: masque les informations personnelles automatiquement</a:t>
+            </a:r>
+          </a:p>
+          <a:p>
+            <a:pPr>
+              <a:spcAft>
+                <a:spcPts val="400"/>
+              </a:spcAft>
+              <a:defRPr sz="1400">
+                <a:solidFill>
+                  <a:srgbClr val="2B2B2B"/>
+                </a:solidFill>
+                <a:latin typeface="Calibri"/>
+              </a:defRPr>
+            </a:pPr>
+            <a:r>
+              <a:t>• Grounding: vérifie que la réponse est basée sur les sources fournies</a:t>
+            </a:r>
+          </a:p>
+          <a:p>
+            <a:pPr>
+              <a:spcAft>
+                <a:spcPts val="400"/>
+              </a:spcAft>
+              <a:defRPr sz="1400">
+                <a:solidFill>
+                  <a:srgbClr val="2B2B2B"/>
+                </a:solidFill>
+                <a:latin typeface="Calibri"/>
+              </a:defRPr>
+            </a:pPr>
+            <a:r>
+              <a:t>• Filtre de sortie: analyse la réponse avant de vous l'afficher</a:t>
+            </a:r>
+          </a:p>
+        </p:txBody>
+      </p:sp>
+      <p:sp>
+        <p:nvSpPr>
+          <p:cNvPr id="6" name="Rectangle 5"/>
           <p:cNvSpPr/>
           <p:nvPr/>
         </p:nvSpPr>
         <p:spPr>
           <a:xfrm>
-            <a:off x="3200400" y="3017520"/>
-            <a:ext cx="2468880" cy="3657600"/>
+            <a:off x="457200" y="2926080"/>
+            <a:ext cx="2468880" cy="3291840"/>
           </a:xfrm>
           <a:prstGeom prst="rect">
             <a:avLst/>
@@ -6752,6 +7439,7 @@
               <a:srgbClr val="E0E0E0"/>
             </a:solidFill>
           </a:ln>
+          <a:effectLst/>
         </p:spPr>
         <p:style>
           <a:lnRef idx="1">
@@ -6775,6 +7463,66 @@
           </a:p>
         </p:txBody>
       </p:sp>
+      <p:pic>
+        <p:nvPicPr>
+          <p:cNvPr id="7" name="Picture 6" descr="filter_00874E_30.png"/>
+          <p:cNvPicPr>
+            <a:picLocks noChangeAspect="1"/>
+          </p:cNvPicPr>
+          <p:nvPr/>
+        </p:nvPicPr>
+        <p:blipFill>
+          <a:blip r:embed="rId3"/>
+          <a:stretch>
+            <a:fillRect/>
+          </a:stretch>
+        </p:blipFill>
+        <p:spPr>
+          <a:xfrm>
+            <a:off x="713232" y="3090672"/>
+            <a:ext cx="292608" cy="292608"/>
+          </a:xfrm>
+          <a:prstGeom prst="rect">
+            <a:avLst/>
+          </a:prstGeom>
+        </p:spPr>
+      </p:pic>
+      <p:sp>
+        <p:nvSpPr>
+          <p:cNvPr id="8" name="TextBox 7"/>
+          <p:cNvSpPr txBox="1"/>
+          <p:nvPr/>
+        </p:nvSpPr>
+        <p:spPr>
+          <a:xfrm>
+            <a:off x="1115568" y="3108960"/>
+            <a:ext cx="1627632" cy="457200"/>
+          </a:xfrm>
+          <a:prstGeom prst="rect">
+            <a:avLst/>
+          </a:prstGeom>
+          <a:noFill/>
+        </p:spPr>
+        <p:txBody>
+          <a:bodyPr wrap="square" lIns="45720" rIns="45720" tIns="18288" bIns="18288">
+            <a:spAutoFit/>
+          </a:bodyPr>
+          <a:lstStyle/>
+          <a:p>
+            <a:pPr algn="l">
+              <a:defRPr sz="1700" b="1">
+                <a:solidFill>
+                  <a:srgbClr val="00874E"/>
+                </a:solidFill>
+                <a:latin typeface="Calibri"/>
+              </a:defRPr>
+            </a:pPr>
+            <a:r>
+              <a:t>1. Filtre d'entrée</a:t>
+            </a:r>
+          </a:p>
+        </p:txBody>
+      </p:sp>
       <p:sp>
         <p:nvSpPr>
           <p:cNvPr id="9" name="TextBox 8"/>
@@ -6783,8 +7531,8 @@
         </p:nvSpPr>
         <p:spPr>
           <a:xfrm>
-            <a:off x="3474720" y="3200400"/>
-            <a:ext cx="1920240" cy="457200"/>
+            <a:off x="731520" y="3703320"/>
+            <a:ext cx="1920240" cy="2331720"/>
           </a:xfrm>
           <a:prstGeom prst="rect">
             <a:avLst/>
@@ -6797,42 +7545,6 @@
           </a:bodyPr>
           <a:lstStyle/>
           <a:p>
-            <a:pPr algn="l">
-              <a:defRPr sz="1800" b="1">
-                <a:solidFill>
-                  <a:srgbClr val="10B981"/>
-                </a:solidFill>
-                <a:latin typeface="Calibri"/>
-              </a:defRPr>
-            </a:pPr>
-            <a:r>
-              <a:t>🔍 2. Détection PII</a:t>
-            </a:r>
-          </a:p>
-        </p:txBody>
-      </p:sp>
-      <p:sp>
-        <p:nvSpPr>
-          <p:cNvPr id="10" name="TextBox 9"/>
-          <p:cNvSpPr txBox="1"/>
-          <p:nvPr/>
-        </p:nvSpPr>
-        <p:spPr>
-          <a:xfrm>
-            <a:off x="3474720" y="3657600"/>
-            <a:ext cx="1920240" cy="2743200"/>
-          </a:xfrm>
-          <a:prstGeom prst="rect">
-            <a:avLst/>
-          </a:prstGeom>
-          <a:noFill/>
-        </p:spPr>
-        <p:txBody>
-          <a:bodyPr wrap="square">
-            <a:spAutoFit/>
-          </a:bodyPr>
-          <a:lstStyle/>
-          <a:p>
             <a:pPr>
               <a:spcAft>
                 <a:spcPts val="400"/>
@@ -6845,7 +7557,7 @@
               </a:defRPr>
             </a:pPr>
             <a:r>
-              <a:t>Recherche les données</a:t>
+              <a:t>Vérifie le prompt avant</a:t>
             </a:r>
           </a:p>
           <a:p>
@@ -6861,7 +7573,7 @@
               </a:defRPr>
             </a:pPr>
             <a:r>
-              <a:t>personnelles</a:t>
+              <a:t>traitement</a:t>
             </a:r>
           </a:p>
           <a:p>
@@ -6890,7 +7602,7 @@
               </a:defRPr>
             </a:pPr>
             <a:r>
-              <a:t>🔹 NAS / SSN</a:t>
+              <a:t>Prompt injection?</a:t>
             </a:r>
           </a:p>
           <a:p>
@@ -6906,7 +7618,7 @@
               </a:defRPr>
             </a:pPr>
             <a:r>
-              <a:t>🔹 Numéros de carte</a:t>
+              <a:t>Contenu dangereux?</a:t>
             </a:r>
           </a:p>
           <a:p>
@@ -6922,21 +7634,21 @@
               </a:defRPr>
             </a:pPr>
             <a:r>
-              <a:t>🔹 Adresses, téléphones</a:t>
-            </a:r>
-          </a:p>
-        </p:txBody>
-      </p:sp>
-      <p:sp>
-        <p:nvSpPr>
-          <p:cNvPr id="11" name="Rectangle 10"/>
+              <a:t>Demande illégale?</a:t>
+            </a:r>
+          </a:p>
+        </p:txBody>
+      </p:sp>
+      <p:sp>
+        <p:nvSpPr>
+          <p:cNvPr id="10" name="Rectangle 9"/>
           <p:cNvSpPr/>
           <p:nvPr/>
         </p:nvSpPr>
         <p:spPr>
           <a:xfrm>
-            <a:off x="5943600" y="3017520"/>
-            <a:ext cx="2468880" cy="3657600"/>
+            <a:off x="3200400" y="2926080"/>
+            <a:ext cx="2468880" cy="3291840"/>
           </a:xfrm>
           <a:prstGeom prst="rect">
             <a:avLst/>
@@ -6949,6 +7661,7 @@
               <a:srgbClr val="E0E0E0"/>
             </a:solidFill>
           </a:ln>
+          <a:effectLst/>
         </p:spPr>
         <p:style>
           <a:lnRef idx="1">
@@ -6972,6 +7685,30 @@
           </a:p>
         </p:txBody>
       </p:sp>
+      <p:pic>
+        <p:nvPicPr>
+          <p:cNvPr id="11" name="Picture 10" descr="scan-eye_00874E_30.png"/>
+          <p:cNvPicPr>
+            <a:picLocks noChangeAspect="1"/>
+          </p:cNvPicPr>
+          <p:nvPr/>
+        </p:nvPicPr>
+        <p:blipFill>
+          <a:blip r:embed="rId4"/>
+          <a:stretch>
+            <a:fillRect/>
+          </a:stretch>
+        </p:blipFill>
+        <p:spPr>
+          <a:xfrm>
+            <a:off x="3456432" y="3090672"/>
+            <a:ext cx="292608" cy="292608"/>
+          </a:xfrm>
+          <a:prstGeom prst="rect">
+            <a:avLst/>
+          </a:prstGeom>
+        </p:spPr>
+      </p:pic>
       <p:sp>
         <p:nvSpPr>
           <p:cNvPr id="12" name="TextBox 11"/>
@@ -6980,8 +7717,44 @@
         </p:nvSpPr>
         <p:spPr>
           <a:xfrm>
-            <a:off x="6217920" y="3200400"/>
-            <a:ext cx="1920240" cy="457200"/>
+            <a:off x="3858768" y="3108960"/>
+            <a:ext cx="1627631" cy="457200"/>
+          </a:xfrm>
+          <a:prstGeom prst="rect">
+            <a:avLst/>
+          </a:prstGeom>
+          <a:noFill/>
+        </p:spPr>
+        <p:txBody>
+          <a:bodyPr wrap="square" lIns="45720" rIns="45720" tIns="18288" bIns="18288">
+            <a:spAutoFit/>
+          </a:bodyPr>
+          <a:lstStyle/>
+          <a:p>
+            <a:pPr algn="l">
+              <a:defRPr sz="1700" b="1">
+                <a:solidFill>
+                  <a:srgbClr val="00874E"/>
+                </a:solidFill>
+                <a:latin typeface="Calibri"/>
+              </a:defRPr>
+            </a:pPr>
+            <a:r>
+              <a:t>2. Détection PII</a:t>
+            </a:r>
+          </a:p>
+        </p:txBody>
+      </p:sp>
+      <p:sp>
+        <p:nvSpPr>
+          <p:cNvPr id="13" name="TextBox 12"/>
+          <p:cNvSpPr txBox="1"/>
+          <p:nvPr/>
+        </p:nvSpPr>
+        <p:spPr>
+          <a:xfrm>
+            <a:off x="3474720" y="3703320"/>
+            <a:ext cx="1920240" cy="2331720"/>
           </a:xfrm>
           <a:prstGeom prst="rect">
             <a:avLst/>
@@ -6994,42 +7767,6 @@
           </a:bodyPr>
           <a:lstStyle/>
           <a:p>
-            <a:pPr algn="l">
-              <a:defRPr sz="1800" b="1">
-                <a:solidFill>
-                  <a:srgbClr val="F59E0B"/>
-                </a:solidFill>
-                <a:latin typeface="Calibri"/>
-              </a:defRPr>
-            </a:pPr>
-            <a:r>
-              <a:t>🎯 3. Grounding</a:t>
-            </a:r>
-          </a:p>
-        </p:txBody>
-      </p:sp>
-      <p:sp>
-        <p:nvSpPr>
-          <p:cNvPr id="13" name="TextBox 12"/>
-          <p:cNvSpPr txBox="1"/>
-          <p:nvPr/>
-        </p:nvSpPr>
-        <p:spPr>
-          <a:xfrm>
-            <a:off x="6217920" y="3657600"/>
-            <a:ext cx="1920240" cy="2743200"/>
-          </a:xfrm>
-          <a:prstGeom prst="rect">
-            <a:avLst/>
-          </a:prstGeom>
-          <a:noFill/>
-        </p:spPr>
-        <p:txBody>
-          <a:bodyPr wrap="square">
-            <a:spAutoFit/>
-          </a:bodyPr>
-          <a:lstStyle/>
-          <a:p>
             <a:pPr>
               <a:spcAft>
                 <a:spcPts val="400"/>
@@ -7042,7 +7779,7 @@
               </a:defRPr>
             </a:pPr>
             <a:r>
-              <a:t>Vérifie les sources</a:t>
+              <a:t>Recherche les données</a:t>
             </a:r>
           </a:p>
           <a:p>
@@ -7057,6 +7794,9 @@
                 <a:latin typeface="Calibri"/>
               </a:defRPr>
             </a:pPr>
+            <a:r>
+              <a:t>personnelles</a:t>
+            </a:r>
           </a:p>
           <a:p>
             <a:pPr>
@@ -7070,9 +7810,6 @@
                 <a:latin typeface="Calibri"/>
               </a:defRPr>
             </a:pPr>
-            <a:r>
-              <a:t>🔹 La réponse cite-t-elle</a:t>
-            </a:r>
           </a:p>
           <a:p>
             <a:pPr>
@@ -7087,7 +7824,7 @@
               </a:defRPr>
             </a:pPr>
             <a:r>
-              <a:t>   des sources réelles?</a:t>
+              <a:t>NAS / SSN</a:t>
             </a:r>
           </a:p>
           <a:p>
@@ -7103,7 +7840,7 @@
               </a:defRPr>
             </a:pPr>
             <a:r>
-              <a:t>🔹 Pas d'hallucination</a:t>
+              <a:t>Numéros de carte</a:t>
             </a:r>
           </a:p>
           <a:p>
@@ -7119,7 +7856,7 @@
               </a:defRPr>
             </a:pPr>
             <a:r>
-              <a:t>🔹 Vérifiable vs données</a:t>
+              <a:t>Adresses, téléphones</a:t>
             </a:r>
           </a:p>
         </p:txBody>
@@ -7132,8 +7869,8 @@
         </p:nvSpPr>
         <p:spPr>
           <a:xfrm>
-            <a:off x="8686800" y="3017520"/>
-            <a:ext cx="2468880" cy="3657600"/>
+            <a:off x="5943600" y="2926080"/>
+            <a:ext cx="2468880" cy="3291840"/>
           </a:xfrm>
           <a:prstGeom prst="rect">
             <a:avLst/>
@@ -7146,6 +7883,7 @@
               <a:srgbClr val="E0E0E0"/>
             </a:solidFill>
           </a:ln>
+          <a:effectLst/>
         </p:spPr>
         <p:style>
           <a:lnRef idx="1">
@@ -7169,16 +7907,76 @@
           </a:p>
         </p:txBody>
       </p:sp>
-      <p:sp>
-        <p:nvSpPr>
-          <p:cNvPr id="15" name="TextBox 14"/>
+      <p:pic>
+        <p:nvPicPr>
+          <p:cNvPr id="15" name="Picture 14" descr="anchor_F59E0B_30.png"/>
+          <p:cNvPicPr>
+            <a:picLocks noChangeAspect="1"/>
+          </p:cNvPicPr>
+          <p:nvPr/>
+        </p:nvPicPr>
+        <p:blipFill>
+          <a:blip r:embed="rId5"/>
+          <a:stretch>
+            <a:fillRect/>
+          </a:stretch>
+        </p:blipFill>
+        <p:spPr>
+          <a:xfrm>
+            <a:off x="6199632" y="3090672"/>
+            <a:ext cx="292608" cy="292608"/>
+          </a:xfrm>
+          <a:prstGeom prst="rect">
+            <a:avLst/>
+          </a:prstGeom>
+        </p:spPr>
+      </p:pic>
+      <p:sp>
+        <p:nvSpPr>
+          <p:cNvPr id="16" name="TextBox 15"/>
           <p:cNvSpPr txBox="1"/>
           <p:nvPr/>
         </p:nvSpPr>
         <p:spPr>
           <a:xfrm>
-            <a:off x="8961120" y="3200400"/>
-            <a:ext cx="1920240" cy="457200"/>
+            <a:off x="6601968" y="3108960"/>
+            <a:ext cx="1627631" cy="457200"/>
+          </a:xfrm>
+          <a:prstGeom prst="rect">
+            <a:avLst/>
+          </a:prstGeom>
+          <a:noFill/>
+        </p:spPr>
+        <p:txBody>
+          <a:bodyPr wrap="square" lIns="45720" rIns="45720" tIns="18288" bIns="18288">
+            <a:spAutoFit/>
+          </a:bodyPr>
+          <a:lstStyle/>
+          <a:p>
+            <a:pPr algn="l">
+              <a:defRPr sz="1700" b="1">
+                <a:solidFill>
+                  <a:srgbClr val="F59E0B"/>
+                </a:solidFill>
+                <a:latin typeface="Calibri"/>
+              </a:defRPr>
+            </a:pPr>
+            <a:r>
+              <a:t>3. Grounding</a:t>
+            </a:r>
+          </a:p>
+        </p:txBody>
+      </p:sp>
+      <p:sp>
+        <p:nvSpPr>
+          <p:cNvPr id="17" name="TextBox 16"/>
+          <p:cNvSpPr txBox="1"/>
+          <p:nvPr/>
+        </p:nvSpPr>
+        <p:spPr>
+          <a:xfrm>
+            <a:off x="6217920" y="3703320"/>
+            <a:ext cx="1920240" cy="2331720"/>
           </a:xfrm>
           <a:prstGeom prst="rect">
             <a:avLst/>
@@ -7191,8 +7989,194 @@
           </a:bodyPr>
           <a:lstStyle/>
           <a:p>
+            <a:pPr>
+              <a:spcAft>
+                <a:spcPts val="400"/>
+              </a:spcAft>
+              <a:defRPr sz="1300">
+                <a:solidFill>
+                  <a:srgbClr val="2B2B2B"/>
+                </a:solidFill>
+                <a:latin typeface="Calibri"/>
+              </a:defRPr>
+            </a:pPr>
+            <a:r>
+              <a:t>Vérifie les sources</a:t>
+            </a:r>
+          </a:p>
+          <a:p>
+            <a:pPr>
+              <a:spcAft>
+                <a:spcPts val="400"/>
+              </a:spcAft>
+              <a:defRPr sz="1300">
+                <a:solidFill>
+                  <a:srgbClr val="2B2B2B"/>
+                </a:solidFill>
+                <a:latin typeface="Calibri"/>
+              </a:defRPr>
+            </a:pPr>
+          </a:p>
+          <a:p>
+            <a:pPr>
+              <a:spcAft>
+                <a:spcPts val="400"/>
+              </a:spcAft>
+              <a:defRPr sz="1300">
+                <a:solidFill>
+                  <a:srgbClr val="2B2B2B"/>
+                </a:solidFill>
+                <a:latin typeface="Calibri"/>
+              </a:defRPr>
+            </a:pPr>
+            <a:r>
+              <a:t>La réponse cite-t-elle</a:t>
+            </a:r>
+          </a:p>
+          <a:p>
+            <a:pPr>
+              <a:spcAft>
+                <a:spcPts val="400"/>
+              </a:spcAft>
+              <a:defRPr sz="1300">
+                <a:solidFill>
+                  <a:srgbClr val="2B2B2B"/>
+                </a:solidFill>
+                <a:latin typeface="Calibri"/>
+              </a:defRPr>
+            </a:pPr>
+            <a:r>
+              <a:t>des sources réelles?</a:t>
+            </a:r>
+          </a:p>
+          <a:p>
+            <a:pPr>
+              <a:spcAft>
+                <a:spcPts val="400"/>
+              </a:spcAft>
+              <a:defRPr sz="1300">
+                <a:solidFill>
+                  <a:srgbClr val="2B2B2B"/>
+                </a:solidFill>
+                <a:latin typeface="Calibri"/>
+              </a:defRPr>
+            </a:pPr>
+            <a:r>
+              <a:t>Pas d'hallucination</a:t>
+            </a:r>
+          </a:p>
+          <a:p>
+            <a:pPr>
+              <a:spcAft>
+                <a:spcPts val="400"/>
+              </a:spcAft>
+              <a:defRPr sz="1300">
+                <a:solidFill>
+                  <a:srgbClr val="2B2B2B"/>
+                </a:solidFill>
+                <a:latin typeface="Calibri"/>
+              </a:defRPr>
+            </a:pPr>
+            <a:r>
+              <a:t>Vérifiable vs données</a:t>
+            </a:r>
+          </a:p>
+        </p:txBody>
+      </p:sp>
+      <p:sp>
+        <p:nvSpPr>
+          <p:cNvPr id="18" name="Rectangle 17"/>
+          <p:cNvSpPr/>
+          <p:nvPr/>
+        </p:nvSpPr>
+        <p:spPr>
+          <a:xfrm>
+            <a:off x="8686800" y="2926080"/>
+            <a:ext cx="2468880" cy="3291840"/>
+          </a:xfrm>
+          <a:prstGeom prst="rect">
+            <a:avLst/>
+          </a:prstGeom>
+          <a:solidFill>
+            <a:srgbClr val="FFFFFF"/>
+          </a:solidFill>
+          <a:ln>
+            <a:solidFill>
+              <a:srgbClr val="E0E0E0"/>
+            </a:solidFill>
+          </a:ln>
+          <a:effectLst/>
+        </p:spPr>
+        <p:style>
+          <a:lnRef idx="1">
+            <a:schemeClr val="accent1"/>
+          </a:lnRef>
+          <a:fillRef idx="3">
+            <a:schemeClr val="accent1"/>
+          </a:fillRef>
+          <a:effectRef idx="2">
+            <a:schemeClr val="accent1"/>
+          </a:effectRef>
+          <a:fontRef idx="minor">
+            <a:schemeClr val="lt1"/>
+          </a:fontRef>
+        </p:style>
+        <p:txBody>
+          <a:bodyPr rtlCol="0" anchor="ctr"/>
+          <a:lstStyle/>
+          <a:p>
+            <a:pPr algn="ctr"/>
+          </a:p>
+        </p:txBody>
+      </p:sp>
+      <p:pic>
+        <p:nvPicPr>
+          <p:cNvPr id="19" name="Picture 18" descr="shield-check_EF4444_30.png"/>
+          <p:cNvPicPr>
+            <a:picLocks noChangeAspect="1"/>
+          </p:cNvPicPr>
+          <p:nvPr/>
+        </p:nvPicPr>
+        <p:blipFill>
+          <a:blip r:embed="rId6"/>
+          <a:stretch>
+            <a:fillRect/>
+          </a:stretch>
+        </p:blipFill>
+        <p:spPr>
+          <a:xfrm>
+            <a:off x="8942832" y="3090672"/>
+            <a:ext cx="292608" cy="292608"/>
+          </a:xfrm>
+          <a:prstGeom prst="rect">
+            <a:avLst/>
+          </a:prstGeom>
+        </p:spPr>
+      </p:pic>
+      <p:sp>
+        <p:nvSpPr>
+          <p:cNvPr id="20" name="TextBox 19"/>
+          <p:cNvSpPr txBox="1"/>
+          <p:nvPr/>
+        </p:nvSpPr>
+        <p:spPr>
+          <a:xfrm>
+            <a:off x="9345167" y="3108960"/>
+            <a:ext cx="1627632" cy="457200"/>
+          </a:xfrm>
+          <a:prstGeom prst="rect">
+            <a:avLst/>
+          </a:prstGeom>
+          <a:noFill/>
+        </p:spPr>
+        <p:txBody>
+          <a:bodyPr wrap="square" lIns="45720" rIns="45720" tIns="18288" bIns="18288">
+            <a:spAutoFit/>
+          </a:bodyPr>
+          <a:lstStyle/>
+          <a:p>
             <a:pPr algn="l">
-              <a:defRPr sz="1800" b="1">
+              <a:defRPr sz="1700" b="1">
                 <a:solidFill>
                   <a:srgbClr val="EF4444"/>
                 </a:solidFill>
@@ -7200,21 +8184,21 @@
               </a:defRPr>
             </a:pPr>
             <a:r>
-              <a:t>🚪 4. Filtre de sortie</a:t>
-            </a:r>
-          </a:p>
-        </p:txBody>
-      </p:sp>
-      <p:sp>
-        <p:nvSpPr>
-          <p:cNvPr id="16" name="TextBox 15"/>
+              <a:t>4. Filtre de sortie</a:t>
+            </a:r>
+          </a:p>
+        </p:txBody>
+      </p:sp>
+      <p:sp>
+        <p:nvSpPr>
+          <p:cNvPr id="21" name="TextBox 20"/>
           <p:cNvSpPr txBox="1"/>
           <p:nvPr/>
         </p:nvSpPr>
         <p:spPr>
           <a:xfrm>
-            <a:off x="8961120" y="3657600"/>
-            <a:ext cx="1920240" cy="2743200"/>
+            <a:off x="8961120" y="3703320"/>
+            <a:ext cx="1920240" cy="2331720"/>
           </a:xfrm>
           <a:prstGeom prst="rect">
             <a:avLst/>
@@ -7284,7 +8268,7 @@
               </a:defRPr>
             </a:pPr>
             <a:r>
-              <a:t>🔹 Contenu inapproprié?</a:t>
+              <a:t>Contenu inapproprié?</a:t>
             </a:r>
           </a:p>
           <a:p>
@@ -7300,7 +8284,7 @@
               </a:defRPr>
             </a:pPr>
             <a:r>
-              <a:t>🔹 Information sensible?</a:t>
+              <a:t>Information sensible?</a:t>
             </a:r>
           </a:p>
           <a:p>
@@ -7316,7 +8300,123 @@
               </a:defRPr>
             </a:pPr>
             <a:r>
-              <a:t>🔹 Conforme aux règles?</a:t>
+              <a:t>Conforme aux règles?</a:t>
+            </a:r>
+          </a:p>
+        </p:txBody>
+      </p:sp>
+      <p:sp>
+        <p:nvSpPr>
+          <p:cNvPr id="22" name="Rectangle 21"/>
+          <p:cNvSpPr/>
+          <p:nvPr/>
+        </p:nvSpPr>
+        <p:spPr>
+          <a:xfrm>
+            <a:off x="457200" y="6446520"/>
+            <a:ext cx="11274552" cy="13716"/>
+          </a:xfrm>
+          <a:prstGeom prst="rect">
+            <a:avLst/>
+          </a:prstGeom>
+          <a:solidFill>
+            <a:srgbClr val="00874E"/>
+          </a:solidFill>
+          <a:ln>
+            <a:noFill/>
+          </a:ln>
+          <a:effectLst/>
+        </p:spPr>
+        <p:style>
+          <a:lnRef idx="1">
+            <a:schemeClr val="accent1"/>
+          </a:lnRef>
+          <a:fillRef idx="3">
+            <a:schemeClr val="accent1"/>
+          </a:fillRef>
+          <a:effectRef idx="2">
+            <a:schemeClr val="accent1"/>
+          </a:effectRef>
+          <a:fontRef idx="minor">
+            <a:schemeClr val="lt1"/>
+          </a:fontRef>
+        </p:style>
+        <p:txBody>
+          <a:bodyPr rtlCol="0" anchor="ctr"/>
+          <a:lstStyle/>
+          <a:p>
+            <a:pPr algn="ctr"/>
+          </a:p>
+        </p:txBody>
+      </p:sp>
+      <p:sp>
+        <p:nvSpPr>
+          <p:cNvPr id="23" name="TextBox 22"/>
+          <p:cNvSpPr txBox="1"/>
+          <p:nvPr/>
+        </p:nvSpPr>
+        <p:spPr>
+          <a:xfrm>
+            <a:off x="457200" y="6537960"/>
+            <a:ext cx="5486400" cy="274320"/>
+          </a:xfrm>
+          <a:prstGeom prst="rect">
+            <a:avLst/>
+          </a:prstGeom>
+          <a:noFill/>
+        </p:spPr>
+        <p:txBody>
+          <a:bodyPr wrap="square" lIns="45720" rIns="45720" tIns="18288" bIns="18288">
+            <a:spAutoFit/>
+          </a:bodyPr>
+          <a:lstStyle/>
+          <a:p>
+            <a:pPr algn="l">
+              <a:defRPr sz="1000" b="0">
+                <a:solidFill>
+                  <a:srgbClr val="6B6B6B"/>
+                </a:solidFill>
+                <a:latin typeface="Calibri"/>
+              </a:defRPr>
+            </a:pPr>
+            <a:r>
+              <a:t>La minute Copilot</a:t>
+            </a:r>
+          </a:p>
+        </p:txBody>
+      </p:sp>
+      <p:sp>
+        <p:nvSpPr>
+          <p:cNvPr id="24" name="TextBox 23"/>
+          <p:cNvSpPr txBox="1"/>
+          <p:nvPr/>
+        </p:nvSpPr>
+        <p:spPr>
+          <a:xfrm>
+            <a:off x="10972800" y="6537960"/>
+            <a:ext cx="822960" cy="274320"/>
+          </a:xfrm>
+          <a:prstGeom prst="rect">
+            <a:avLst/>
+          </a:prstGeom>
+          <a:noFill/>
+        </p:spPr>
+        <p:txBody>
+          <a:bodyPr wrap="square" lIns="45720" rIns="45720" tIns="18288" bIns="18288">
+            <a:spAutoFit/>
+          </a:bodyPr>
+          <a:lstStyle/>
+          <a:p>
+            <a:pPr algn="r">
+              <a:defRPr sz="1000" b="0">
+                <a:solidFill>
+                  <a:srgbClr val="6B6B6B"/>
+                </a:solidFill>
+                <a:latin typeface="Calibri"/>
+              </a:defRPr>
+            </a:pPr>
+            <a:r>
+              <a:t>5</a:t>
             </a:r>
           </a:p>
         </p:txBody>
@@ -7335,7 +8435,7 @@
     <p:bg>
       <p:bgPr>
         <a:solidFill>
-          <a:srgbClr val="0078D4"/>
+          <a:srgbClr val="00874E"/>
         </a:solidFill>
         <a:effectLst/>
       </p:bgPr>
@@ -7355,8 +8455,8 @@
         </p:nvSpPr>
         <p:spPr>
           <a:xfrm>
-            <a:off x="914400" y="914400"/>
-            <a:ext cx="10058400" cy="731520"/>
+            <a:off x="914400" y="731520"/>
+            <a:ext cx="10360152" cy="822960"/>
           </a:xfrm>
           <a:prstGeom prst="rect">
             <a:avLst/>
@@ -7364,13 +8464,13 @@
           <a:noFill/>
         </p:spPr>
         <p:txBody>
-          <a:bodyPr wrap="square">
+          <a:bodyPr wrap="square" lIns="45720" rIns="45720" tIns="18288" bIns="18288">
             <a:spAutoFit/>
           </a:bodyPr>
           <a:lstStyle/>
           <a:p>
             <a:pPr algn="ctr">
-              <a:defRPr sz="4000" b="1">
+              <a:defRPr sz="3600" b="1">
                 <a:solidFill>
                   <a:srgbClr val="FFFFFF"/>
                 </a:solidFill>
@@ -7378,7 +8478,7 @@
               </a:defRPr>
             </a:pPr>
             <a:r>
-              <a:t>🎯 À retenir — L'architecture en bref</a:t>
+              <a:t>À retenir — L'architecture en bref</a:t>
             </a:r>
           </a:p>
         </p:txBody>
@@ -7391,8 +8491,8 @@
         </p:nvSpPr>
         <p:spPr>
           <a:xfrm>
-            <a:off x="-310895" y="2011680"/>
-            <a:ext cx="3474720" cy="2286000"/>
+            <a:off x="4572000" y="1691640"/>
+            <a:ext cx="3044952" cy="36576"/>
           </a:xfrm>
           <a:prstGeom prst="rect">
             <a:avLst/>
@@ -7401,10 +8501,9 @@
             <a:srgbClr val="FFFFFF"/>
           </a:solidFill>
           <a:ln>
-            <a:solidFill>
-              <a:srgbClr val="AAD4F0"/>
-            </a:solidFill>
+            <a:noFill/>
           </a:ln>
+          <a:effectLst/>
         </p:spPr>
         <p:style>
           <a:lnRef idx="1">
@@ -7430,90 +8529,14 @@
       </p:sp>
       <p:sp>
         <p:nvSpPr>
-          <p:cNvPr id="4" name="TextBox 3"/>
-          <p:cNvSpPr txBox="1"/>
-          <p:nvPr/>
-        </p:nvSpPr>
-        <p:spPr>
-          <a:xfrm>
-            <a:off x="-36575" y="2194560"/>
-            <a:ext cx="2926079" cy="548640"/>
-          </a:xfrm>
-          <a:prstGeom prst="rect">
-            <a:avLst/>
-          </a:prstGeom>
-          <a:noFill/>
-        </p:spPr>
-        <p:txBody>
-          <a:bodyPr wrap="square">
-            <a:spAutoFit/>
-          </a:bodyPr>
-          <a:lstStyle/>
-          <a:p>
-            <a:pPr algn="ctr">
-              <a:defRPr sz="2200" b="1">
-                <a:solidFill>
-                  <a:srgbClr val="2B2B2B"/>
-                </a:solidFill>
-                <a:latin typeface="Calibri"/>
-              </a:defRPr>
-            </a:pPr>
-            <a:r>
-              <a:t>📦 1. Métaprompt</a:t>
-            </a:r>
-          </a:p>
-        </p:txBody>
-      </p:sp>
-      <p:sp>
-        <p:nvSpPr>
-          <p:cNvPr id="5" name="TextBox 4"/>
-          <p:cNvSpPr txBox="1"/>
-          <p:nvPr/>
-        </p:nvSpPr>
-        <p:spPr>
-          <a:xfrm>
-            <a:off x="-36575" y="2926080"/>
-            <a:ext cx="2926079" cy="914400"/>
-          </a:xfrm>
-          <a:prstGeom prst="rect">
-            <a:avLst/>
-          </a:prstGeom>
-          <a:noFill/>
-        </p:spPr>
-        <p:txBody>
-          <a:bodyPr wrap="square">
-            <a:spAutoFit/>
-          </a:bodyPr>
-          <a:lstStyle/>
-          <a:p>
-            <a:pPr algn="ctr">
-              <a:defRPr sz="1600" b="0">
-                <a:solidFill>
-                  <a:srgbClr val="6B6B6B"/>
-                </a:solidFill>
-                <a:latin typeface="Calibri"/>
-              </a:defRPr>
-            </a:pPr>
-            <a:r>
-              <a:t>Microsoft ajoute 10K tokens</a:t>
-            </a:r>
-            <a:br/>
-            <a:r>
-              <a:t>d'instructions AVANT votre prompt</a:t>
-            </a:r>
-          </a:p>
-        </p:txBody>
-      </p:sp>
-      <p:sp>
-        <p:nvSpPr>
-          <p:cNvPr id="6" name="Rectangle 5"/>
+          <p:cNvPr id="4" name="Rectangle 3"/>
           <p:cNvSpPr/>
           <p:nvPr/>
         </p:nvSpPr>
         <p:spPr>
           <a:xfrm>
-            <a:off x="2395728" y="2011680"/>
-            <a:ext cx="3474720" cy="2286000"/>
+            <a:off x="731520" y="2103120"/>
+            <a:ext cx="2475738" cy="2286000"/>
           </a:xfrm>
           <a:prstGeom prst="rect">
             <a:avLst/>
@@ -7523,9 +8546,10 @@
           </a:solidFill>
           <a:ln>
             <a:solidFill>
-              <a:srgbClr val="AAD4F0"/>
+              <a:srgbClr val="CCE0D2"/>
             </a:solidFill>
           </a:ln>
+          <a:effectLst/>
         </p:spPr>
         <p:style>
           <a:lnRef idx="1">
@@ -7549,6 +8573,66 @@
           </a:p>
         </p:txBody>
       </p:sp>
+      <p:pic>
+        <p:nvPicPr>
+          <p:cNvPr id="5" name="Picture 4" descr="package_006B3F_28.png"/>
+          <p:cNvPicPr>
+            <a:picLocks noChangeAspect="1"/>
+          </p:cNvPicPr>
+          <p:nvPr/>
+        </p:nvPicPr>
+        <p:blipFill>
+          <a:blip r:embed="rId3"/>
+          <a:stretch>
+            <a:fillRect/>
+          </a:stretch>
+        </p:blipFill>
+        <p:spPr>
+          <a:xfrm>
+            <a:off x="1832229" y="2176272"/>
+            <a:ext cx="274320" cy="274320"/>
+          </a:xfrm>
+          <a:prstGeom prst="rect">
+            <a:avLst/>
+          </a:prstGeom>
+        </p:spPr>
+      </p:pic>
+      <p:sp>
+        <p:nvSpPr>
+          <p:cNvPr id="6" name="TextBox 5"/>
+          <p:cNvSpPr txBox="1"/>
+          <p:nvPr/>
+        </p:nvSpPr>
+        <p:spPr>
+          <a:xfrm>
+            <a:off x="868680" y="2523744"/>
+            <a:ext cx="2201418" cy="548640"/>
+          </a:xfrm>
+          <a:prstGeom prst="rect">
+            <a:avLst/>
+          </a:prstGeom>
+          <a:noFill/>
+        </p:spPr>
+        <p:txBody>
+          <a:bodyPr wrap="square" lIns="45720" rIns="45720" tIns="18288" bIns="18288">
+            <a:spAutoFit/>
+          </a:bodyPr>
+          <a:lstStyle/>
+          <a:p>
+            <a:pPr algn="ctr">
+              <a:defRPr sz="1700" b="1">
+                <a:solidFill>
+                  <a:srgbClr val="006B3F"/>
+                </a:solidFill>
+                <a:latin typeface="Calibri"/>
+              </a:defRPr>
+            </a:pPr>
+            <a:r>
+              <a:t>1. Métaprompt</a:t>
+            </a:r>
+          </a:p>
+        </p:txBody>
+      </p:sp>
       <p:sp>
         <p:nvSpPr>
           <p:cNvPr id="7" name="TextBox 6"/>
@@ -7557,8 +8641,8 @@
         </p:nvSpPr>
         <p:spPr>
           <a:xfrm>
-            <a:off x="2670048" y="2194560"/>
-            <a:ext cx="2926079" cy="548640"/>
+            <a:off x="868680" y="3163824"/>
+            <a:ext cx="2201418" cy="914400"/>
           </a:xfrm>
           <a:prstGeom prst="rect">
             <a:avLst/>
@@ -7566,49 +8650,13 @@
           <a:noFill/>
         </p:spPr>
         <p:txBody>
-          <a:bodyPr wrap="square">
+          <a:bodyPr wrap="square" lIns="45720" rIns="45720" tIns="18288" bIns="18288">
             <a:spAutoFit/>
           </a:bodyPr>
           <a:lstStyle/>
           <a:p>
             <a:pPr algn="ctr">
-              <a:defRPr sz="2200" b="1">
-                <a:solidFill>
-                  <a:srgbClr val="2B2B2B"/>
-                </a:solidFill>
-                <a:latin typeface="Calibri"/>
-              </a:defRPr>
-            </a:pPr>
-            <a:r>
-              <a:t>🌡️ 2. Température</a:t>
-            </a:r>
-          </a:p>
-        </p:txBody>
-      </p:sp>
-      <p:sp>
-        <p:nvSpPr>
-          <p:cNvPr id="8" name="TextBox 7"/>
-          <p:cNvSpPr txBox="1"/>
-          <p:nvPr/>
-        </p:nvSpPr>
-        <p:spPr>
-          <a:xfrm>
-            <a:off x="2670048" y="2926080"/>
-            <a:ext cx="2926079" cy="914400"/>
-          </a:xfrm>
-          <a:prstGeom prst="rect">
-            <a:avLst/>
-          </a:prstGeom>
-          <a:noFill/>
-        </p:spPr>
-        <p:txBody>
-          <a:bodyPr wrap="square">
-            <a:spAutoFit/>
-          </a:bodyPr>
-          <a:lstStyle/>
-          <a:p>
-            <a:pPr algn="ctr">
-              <a:defRPr sz="1600" b="0">
+              <a:defRPr sz="1200" b="0">
                 <a:solidFill>
                   <a:srgbClr val="6B6B6B"/>
                 </a:solidFill>
@@ -7616,25 +8664,25 @@
               </a:defRPr>
             </a:pPr>
             <a:r>
-              <a:t>Basse (0.1-0.3)</a:t>
+              <a:t>Microsoft ajoute 10K tokens</a:t>
             </a:r>
             <a:br/>
             <a:r>
-              <a:t>= fiable, pas créatif</a:t>
-            </a:r>
-          </a:p>
-        </p:txBody>
-      </p:sp>
-      <p:sp>
-        <p:nvSpPr>
-          <p:cNvPr id="9" name="Rectangle 8"/>
+              <a:t>d'instructions AVANT votre prompt</a:t>
+            </a:r>
+          </a:p>
+        </p:txBody>
+      </p:sp>
+      <p:sp>
+        <p:nvSpPr>
+          <p:cNvPr id="8" name="Rectangle 7"/>
           <p:cNvSpPr/>
           <p:nvPr/>
         </p:nvSpPr>
         <p:spPr>
           <a:xfrm>
-            <a:off x="5102352" y="2011680"/>
-            <a:ext cx="3474720" cy="2286000"/>
+            <a:off x="3481578" y="2103120"/>
+            <a:ext cx="2475738" cy="2286000"/>
           </a:xfrm>
           <a:prstGeom prst="rect">
             <a:avLst/>
@@ -7644,9 +8692,10 @@
           </a:solidFill>
           <a:ln>
             <a:solidFill>
-              <a:srgbClr val="AAD4F0"/>
+              <a:srgbClr val="CCE0D2"/>
             </a:solidFill>
           </a:ln>
+          <a:effectLst/>
         </p:spPr>
         <p:style>
           <a:lnRef idx="1">
@@ -7670,6 +8719,30 @@
           </a:p>
         </p:txBody>
       </p:sp>
+      <p:pic>
+        <p:nvPicPr>
+          <p:cNvPr id="9" name="Picture 8" descr="thermometer_006B3F_28.png"/>
+          <p:cNvPicPr>
+            <a:picLocks noChangeAspect="1"/>
+          </p:cNvPicPr>
+          <p:nvPr/>
+        </p:nvPicPr>
+        <p:blipFill>
+          <a:blip r:embed="rId4"/>
+          <a:stretch>
+            <a:fillRect/>
+          </a:stretch>
+        </p:blipFill>
+        <p:spPr>
+          <a:xfrm>
+            <a:off x="4582287" y="2176272"/>
+            <a:ext cx="274320" cy="274320"/>
+          </a:xfrm>
+          <a:prstGeom prst="rect">
+            <a:avLst/>
+          </a:prstGeom>
+        </p:spPr>
+      </p:pic>
       <p:sp>
         <p:nvSpPr>
           <p:cNvPr id="10" name="TextBox 9"/>
@@ -7678,8 +8751,8 @@
         </p:nvSpPr>
         <p:spPr>
           <a:xfrm>
-            <a:off x="5376672" y="2194560"/>
-            <a:ext cx="2926079" cy="548640"/>
+            <a:off x="3618738" y="2523744"/>
+            <a:ext cx="2201418" cy="548640"/>
           </a:xfrm>
           <a:prstGeom prst="rect">
             <a:avLst/>
@@ -7687,21 +8760,21 @@
           <a:noFill/>
         </p:spPr>
         <p:txBody>
-          <a:bodyPr wrap="square">
+          <a:bodyPr wrap="square" lIns="45720" rIns="45720" tIns="18288" bIns="18288">
             <a:spAutoFit/>
           </a:bodyPr>
           <a:lstStyle/>
           <a:p>
             <a:pPr algn="ctr">
-              <a:defRPr sz="2200" b="1">
-                <a:solidFill>
-                  <a:srgbClr val="2B2B2B"/>
-                </a:solidFill>
-                <a:latin typeface="Calibri"/>
-              </a:defRPr>
-            </a:pPr>
-            <a:r>
-              <a:t>⚡ 3. Cache &amp; Tokens</a:t>
+              <a:defRPr sz="1700" b="1">
+                <a:solidFill>
+                  <a:srgbClr val="006B3F"/>
+                </a:solidFill>
+                <a:latin typeface="Calibri"/>
+              </a:defRPr>
+            </a:pPr>
+            <a:r>
+              <a:t>2. Température</a:t>
             </a:r>
           </a:p>
         </p:txBody>
@@ -7714,8 +8787,8 @@
         </p:nvSpPr>
         <p:spPr>
           <a:xfrm>
-            <a:off x="5376672" y="2926080"/>
-            <a:ext cx="2926079" cy="914400"/>
+            <a:off x="3618738" y="3163824"/>
+            <a:ext cx="2201418" cy="914400"/>
           </a:xfrm>
           <a:prstGeom prst="rect">
             <a:avLst/>
@@ -7723,13 +8796,13 @@
           <a:noFill/>
         </p:spPr>
         <p:txBody>
-          <a:bodyPr wrap="square">
+          <a:bodyPr wrap="square" lIns="45720" rIns="45720" tIns="18288" bIns="18288">
             <a:spAutoFit/>
           </a:bodyPr>
           <a:lstStyle/>
           <a:p>
             <a:pPr algn="ctr">
-              <a:defRPr sz="1600" b="0">
+              <a:defRPr sz="1200" b="0">
                 <a:solidFill>
                   <a:srgbClr val="6B6B6B"/>
                 </a:solidFill>
@@ -7737,11 +8810,11 @@
               </a:defRPr>
             </a:pPr>
             <a:r>
-              <a:t>Cache par tenant</a:t>
+              <a:t>Basse (0.1-0.3)</a:t>
             </a:r>
             <a:br/>
             <a:r>
-              <a:t>128K tokens max</a:t>
+              <a:t>= fiable, pas créatif</a:t>
             </a:r>
           </a:p>
         </p:txBody>
@@ -7754,8 +8827,8 @@
         </p:nvSpPr>
         <p:spPr>
           <a:xfrm>
-            <a:off x="7808975" y="2011680"/>
-            <a:ext cx="3474720" cy="2286000"/>
+            <a:off x="6231636" y="2103120"/>
+            <a:ext cx="2475738" cy="2286000"/>
           </a:xfrm>
           <a:prstGeom prst="rect">
             <a:avLst/>
@@ -7765,9 +8838,10 @@
           </a:solidFill>
           <a:ln>
             <a:solidFill>
-              <a:srgbClr val="AAD4F0"/>
+              <a:srgbClr val="CCE0D2"/>
             </a:solidFill>
           </a:ln>
+          <a:effectLst/>
         </p:spPr>
         <p:style>
           <a:lnRef idx="1">
@@ -7791,16 +8865,40 @@
           </a:p>
         </p:txBody>
       </p:sp>
-      <p:sp>
-        <p:nvSpPr>
-          <p:cNvPr id="13" name="TextBox 12"/>
+      <p:pic>
+        <p:nvPicPr>
+          <p:cNvPr id="13" name="Picture 12" descr="coins_006B3F_28.png"/>
+          <p:cNvPicPr>
+            <a:picLocks noChangeAspect="1"/>
+          </p:cNvPicPr>
+          <p:nvPr/>
+        </p:nvPicPr>
+        <p:blipFill>
+          <a:blip r:embed="rId5"/>
+          <a:stretch>
+            <a:fillRect/>
+          </a:stretch>
+        </p:blipFill>
+        <p:spPr>
+          <a:xfrm>
+            <a:off x="7332344" y="2176272"/>
+            <a:ext cx="274320" cy="274320"/>
+          </a:xfrm>
+          <a:prstGeom prst="rect">
+            <a:avLst/>
+          </a:prstGeom>
+        </p:spPr>
+      </p:pic>
+      <p:sp>
+        <p:nvSpPr>
+          <p:cNvPr id="14" name="TextBox 13"/>
           <p:cNvSpPr txBox="1"/>
           <p:nvPr/>
         </p:nvSpPr>
         <p:spPr>
           <a:xfrm>
-            <a:off x="8083296" y="2194560"/>
-            <a:ext cx="2926079" cy="548640"/>
+            <a:off x="6368796" y="2523744"/>
+            <a:ext cx="2201418" cy="548640"/>
           </a:xfrm>
           <a:prstGeom prst="rect">
             <a:avLst/>
@@ -7808,35 +8906,35 @@
           <a:noFill/>
         </p:spPr>
         <p:txBody>
-          <a:bodyPr wrap="square">
+          <a:bodyPr wrap="square" lIns="45720" rIns="45720" tIns="18288" bIns="18288">
             <a:spAutoFit/>
           </a:bodyPr>
           <a:lstStyle/>
           <a:p>
             <a:pPr algn="ctr">
-              <a:defRPr sz="2200" b="1">
-                <a:solidFill>
-                  <a:srgbClr val="2B2B2B"/>
-                </a:solidFill>
-                <a:latin typeface="Calibri"/>
-              </a:defRPr>
-            </a:pPr>
-            <a:r>
-              <a:t>🛡️ 4. Sécurité</a:t>
-            </a:r>
-          </a:p>
-        </p:txBody>
-      </p:sp>
-      <p:sp>
-        <p:nvSpPr>
-          <p:cNvPr id="14" name="TextBox 13"/>
+              <a:defRPr sz="1700" b="1">
+                <a:solidFill>
+                  <a:srgbClr val="006B3F"/>
+                </a:solidFill>
+                <a:latin typeface="Calibri"/>
+              </a:defRPr>
+            </a:pPr>
+            <a:r>
+              <a:t>3. Cache &amp; Tokens</a:t>
+            </a:r>
+          </a:p>
+        </p:txBody>
+      </p:sp>
+      <p:sp>
+        <p:nvSpPr>
+          <p:cNvPr id="15" name="TextBox 14"/>
           <p:cNvSpPr txBox="1"/>
           <p:nvPr/>
         </p:nvSpPr>
         <p:spPr>
           <a:xfrm>
-            <a:off x="8083296" y="2926080"/>
-            <a:ext cx="2926079" cy="914400"/>
+            <a:off x="6368796" y="3163824"/>
+            <a:ext cx="2201418" cy="914400"/>
           </a:xfrm>
           <a:prstGeom prst="rect">
             <a:avLst/>
@@ -7844,13 +8942,13 @@
           <a:noFill/>
         </p:spPr>
         <p:txBody>
-          <a:bodyPr wrap="square">
+          <a:bodyPr wrap="square" lIns="45720" rIns="45720" tIns="18288" bIns="18288">
             <a:spAutoFit/>
           </a:bodyPr>
           <a:lstStyle/>
           <a:p>
             <a:pPr algn="ctr">
-              <a:defRPr sz="1600" b="0">
+              <a:defRPr sz="1200" b="0">
                 <a:solidFill>
                   <a:srgbClr val="6B6B6B"/>
                 </a:solidFill>
@@ -7858,37 +8956,38 @@
               </a:defRPr>
             </a:pPr>
             <a:r>
-              <a:t>4 couches de filtres</a:t>
+              <a:t>Cache par tenant</a:t>
             </a:r>
             <a:br/>
             <a:r>
-              <a:t>PII, entrée, sortie, grounding</a:t>
-            </a:r>
-          </a:p>
-        </p:txBody>
-      </p:sp>
-      <p:sp>
-        <p:nvSpPr>
-          <p:cNvPr id="15" name="Rectangle 14"/>
+              <a:t>128K tokens max</a:t>
+            </a:r>
+          </a:p>
+        </p:txBody>
+      </p:sp>
+      <p:sp>
+        <p:nvSpPr>
+          <p:cNvPr id="16" name="Rectangle 15"/>
           <p:cNvSpPr/>
           <p:nvPr/>
         </p:nvSpPr>
         <p:spPr>
           <a:xfrm>
-            <a:off x="3200400" y="4754880"/>
-            <a:ext cx="5760720" cy="1097280"/>
+            <a:off x="8981694" y="2103120"/>
+            <a:ext cx="2475738" cy="2286000"/>
           </a:xfrm>
           <a:prstGeom prst="rect">
             <a:avLst/>
           </a:prstGeom>
           <a:solidFill>
-            <a:srgbClr val="FFF3CD"/>
+            <a:srgbClr val="FFFFFF"/>
           </a:solidFill>
           <a:ln>
             <a:solidFill>
-              <a:srgbClr val="FFE082"/>
+              <a:srgbClr val="CCE0D2"/>
             </a:solidFill>
           </a:ln>
+          <a:effectLst/>
         </p:spPr>
         <p:style>
           <a:lnRef idx="1">
@@ -7912,16 +9011,40 @@
           </a:p>
         </p:txBody>
       </p:sp>
-      <p:sp>
-        <p:nvSpPr>
-          <p:cNvPr id="16" name="TextBox 15"/>
+      <p:pic>
+        <p:nvPicPr>
+          <p:cNvPr id="17" name="Picture 16" descr="shield_006B3F_28.png"/>
+          <p:cNvPicPr>
+            <a:picLocks noChangeAspect="1"/>
+          </p:cNvPicPr>
+          <p:nvPr/>
+        </p:nvPicPr>
+        <p:blipFill>
+          <a:blip r:embed="rId6"/>
+          <a:stretch>
+            <a:fillRect/>
+          </a:stretch>
+        </p:blipFill>
+        <p:spPr>
+          <a:xfrm>
+            <a:off x="10082403" y="2176272"/>
+            <a:ext cx="274320" cy="274320"/>
+          </a:xfrm>
+          <a:prstGeom prst="rect">
+            <a:avLst/>
+          </a:prstGeom>
+        </p:spPr>
+      </p:pic>
+      <p:sp>
+        <p:nvSpPr>
+          <p:cNvPr id="18" name="TextBox 17"/>
           <p:cNvSpPr txBox="1"/>
           <p:nvPr/>
         </p:nvSpPr>
         <p:spPr>
           <a:xfrm>
-            <a:off x="3383280" y="4937760"/>
-            <a:ext cx="5394960" cy="548640"/>
+            <a:off x="9118854" y="2523744"/>
+            <a:ext cx="2201418" cy="548640"/>
           </a:xfrm>
           <a:prstGeom prst="rect">
             <a:avLst/>
@@ -7929,35 +9052,35 @@
           <a:noFill/>
         </p:spPr>
         <p:txBody>
-          <a:bodyPr wrap="square">
+          <a:bodyPr wrap="square" lIns="45720" rIns="45720" tIns="18288" bIns="18288">
             <a:spAutoFit/>
           </a:bodyPr>
           <a:lstStyle/>
           <a:p>
             <a:pPr algn="ctr">
-              <a:defRPr sz="1600" b="1">
-                <a:solidFill>
-                  <a:srgbClr val="856E04"/>
-                </a:solidFill>
-                <a:latin typeface="Calibri"/>
-              </a:defRPr>
-            </a:pPr>
-            <a:r>
-              <a:t>💡 En entreprise, la fiabilité et la sécurité passent avant la créativité — c'est le choix de conception de Copilot!</a:t>
-            </a:r>
-          </a:p>
-        </p:txBody>
-      </p:sp>
-      <p:sp>
-        <p:nvSpPr>
-          <p:cNvPr id="17" name="TextBox 16"/>
+              <a:defRPr sz="1700" b="1">
+                <a:solidFill>
+                  <a:srgbClr val="006B3F"/>
+                </a:solidFill>
+                <a:latin typeface="Calibri"/>
+              </a:defRPr>
+            </a:pPr>
+            <a:r>
+              <a:t>4. Sécurité</a:t>
+            </a:r>
+          </a:p>
+        </p:txBody>
+      </p:sp>
+      <p:sp>
+        <p:nvSpPr>
+          <p:cNvPr id="19" name="TextBox 18"/>
           <p:cNvSpPr txBox="1"/>
           <p:nvPr/>
         </p:nvSpPr>
         <p:spPr>
           <a:xfrm>
-            <a:off x="914400" y="6126480"/>
-            <a:ext cx="10058400" cy="457200"/>
+            <a:off x="9118854" y="3163824"/>
+            <a:ext cx="2201418" cy="914400"/>
           </a:xfrm>
           <a:prstGeom prst="rect">
             <a:avLst/>
@@ -7965,21 +9088,187 @@
           <a:noFill/>
         </p:spPr>
         <p:txBody>
-          <a:bodyPr wrap="square">
+          <a:bodyPr wrap="square" lIns="45720" rIns="45720" tIns="18288" bIns="18288">
             <a:spAutoFit/>
           </a:bodyPr>
           <a:lstStyle/>
           <a:p>
             <a:pPr algn="ctr">
-              <a:defRPr sz="1400" b="0">
-                <a:solidFill>
-                  <a:srgbClr val="AAD4F0"/>
-                </a:solidFill>
-                <a:latin typeface="Calibri"/>
-              </a:defRPr>
-            </a:pPr>
-            <a:r>
-              <a:t>La minute Copilot — À la semaine prochaine! 👋</a:t>
+              <a:defRPr sz="1200" b="0">
+                <a:solidFill>
+                  <a:srgbClr val="6B6B6B"/>
+                </a:solidFill>
+                <a:latin typeface="Calibri"/>
+              </a:defRPr>
+            </a:pPr>
+            <a:r>
+              <a:t>4 couches de filtres</a:t>
+            </a:r>
+            <a:br/>
+            <a:r>
+              <a:t>PII, entrée, sortie, grounding</a:t>
+            </a:r>
+          </a:p>
+        </p:txBody>
+      </p:sp>
+      <p:sp>
+        <p:nvSpPr>
+          <p:cNvPr id="20" name="Rectangle 19"/>
+          <p:cNvSpPr/>
+          <p:nvPr/>
+        </p:nvSpPr>
+        <p:spPr>
+          <a:xfrm>
+            <a:off x="2423160" y="4681728"/>
+            <a:ext cx="7342631" cy="1078992"/>
+          </a:xfrm>
+          <a:prstGeom prst="rect">
+            <a:avLst/>
+          </a:prstGeom>
+          <a:solidFill>
+            <a:srgbClr val="FFFFFF"/>
+          </a:solidFill>
+          <a:ln>
+            <a:solidFill>
+              <a:srgbClr val="CCE0D2"/>
+            </a:solidFill>
+          </a:ln>
+          <a:effectLst/>
+        </p:spPr>
+        <p:style>
+          <a:lnRef idx="1">
+            <a:schemeClr val="accent1"/>
+          </a:lnRef>
+          <a:fillRef idx="3">
+            <a:schemeClr val="accent1"/>
+          </a:fillRef>
+          <a:effectRef idx="2">
+            <a:schemeClr val="accent1"/>
+          </a:effectRef>
+          <a:fontRef idx="minor">
+            <a:schemeClr val="lt1"/>
+          </a:fontRef>
+        </p:style>
+        <p:txBody>
+          <a:bodyPr rtlCol="0" anchor="ctr"/>
+          <a:lstStyle/>
+          <a:p>
+            <a:pPr algn="ctr"/>
+          </a:p>
+        </p:txBody>
+      </p:sp>
+      <p:sp>
+        <p:nvSpPr>
+          <p:cNvPr id="21" name="Rectangle 20"/>
+          <p:cNvSpPr/>
+          <p:nvPr/>
+        </p:nvSpPr>
+        <p:spPr>
+          <a:xfrm>
+            <a:off x="2423160" y="4681728"/>
+            <a:ext cx="64008" cy="1078992"/>
+          </a:xfrm>
+          <a:prstGeom prst="rect">
+            <a:avLst/>
+          </a:prstGeom>
+          <a:solidFill>
+            <a:srgbClr val="00874E"/>
+          </a:solidFill>
+          <a:ln>
+            <a:noFill/>
+          </a:ln>
+          <a:effectLst/>
+        </p:spPr>
+        <p:style>
+          <a:lnRef idx="1">
+            <a:schemeClr val="accent1"/>
+          </a:lnRef>
+          <a:fillRef idx="3">
+            <a:schemeClr val="accent1"/>
+          </a:fillRef>
+          <a:effectRef idx="2">
+            <a:schemeClr val="accent1"/>
+          </a:effectRef>
+          <a:fontRef idx="minor">
+            <a:schemeClr val="lt1"/>
+          </a:fontRef>
+        </p:style>
+        <p:txBody>
+          <a:bodyPr rtlCol="0" anchor="ctr"/>
+          <a:lstStyle/>
+          <a:p>
+            <a:pPr algn="ctr"/>
+          </a:p>
+        </p:txBody>
+      </p:sp>
+      <p:sp>
+        <p:nvSpPr>
+          <p:cNvPr id="22" name="TextBox 21"/>
+          <p:cNvSpPr txBox="1"/>
+          <p:nvPr/>
+        </p:nvSpPr>
+        <p:spPr>
+          <a:xfrm>
+            <a:off x="2587752" y="4937760"/>
+            <a:ext cx="7013447" cy="713231"/>
+          </a:xfrm>
+          <a:prstGeom prst="rect">
+            <a:avLst/>
+          </a:prstGeom>
+          <a:noFill/>
+        </p:spPr>
+        <p:txBody>
+          <a:bodyPr wrap="square" lIns="45720" rIns="45720" tIns="18288" bIns="18288">
+            <a:spAutoFit/>
+          </a:bodyPr>
+          <a:lstStyle/>
+          <a:p>
+            <a:pPr algn="ctr">
+              <a:defRPr sz="1500" b="1">
+                <a:solidFill>
+                  <a:srgbClr val="006B3F"/>
+                </a:solidFill>
+                <a:latin typeface="Calibri"/>
+              </a:defRPr>
+            </a:pPr>
+            <a:r>
+              <a:t>En entreprise, la fiabilité et la sécurité passent avant la créativité — c'est le choix de conception de Copilot!</a:t>
+            </a:r>
+          </a:p>
+        </p:txBody>
+      </p:sp>
+      <p:sp>
+        <p:nvSpPr>
+          <p:cNvPr id="23" name="TextBox 22"/>
+          <p:cNvSpPr txBox="1"/>
+          <p:nvPr/>
+        </p:nvSpPr>
+        <p:spPr>
+          <a:xfrm>
+            <a:off x="914400" y="5989320"/>
+            <a:ext cx="10360152" cy="365760"/>
+          </a:xfrm>
+          <a:prstGeom prst="rect">
+            <a:avLst/>
+          </a:prstGeom>
+          <a:noFill/>
+        </p:spPr>
+        <p:txBody>
+          <a:bodyPr wrap="square" lIns="45720" rIns="45720" tIns="18288" bIns="18288">
+            <a:spAutoFit/>
+          </a:bodyPr>
+          <a:lstStyle/>
+          <a:p>
+            <a:pPr algn="ctr">
+              <a:defRPr sz="1300" b="0">
+                <a:solidFill>
+                  <a:srgbClr val="CCE0D2"/>
+                </a:solidFill>
+                <a:latin typeface="Calibri"/>
+              </a:defRPr>
+            </a:pPr>
+            <a:r>
+              <a:t>La minute Copilot — À la semaine prochaine!</a:t>
             </a:r>
           </a:p>
         </p:txBody>
